--- a/template.pptx
+++ b/template.pptx
@@ -20328,13 +20328,13 @@
   <p:clrMapOvr>
     <a:masterClrMapping/>
   </p:clrMapOvr>
-  <mc:AlternateContent xmlns:mc="http://schemas.openxmlformats.org/markup-compatibility/2006">
-    <mc:Choice xmlns:p159="http://schemas.microsoft.com/office/powerpoint/2015/09/main" Requires="p159">
+  <mc:AlternateContent xmlns:mc="http://schemas.openxmlformats.org/markup-compatibility/2006" xmlns:p159="http://schemas.microsoft.com/office/powerpoint/2015/09/main">
+    <mc:Choice Requires="p159">
       <p:transition spd="slow">
         <p159:morph option="byObject"/>
       </p:transition>
     </mc:Choice>
-    <mc:Fallback>
+    <mc:Fallback xmlns="">
       <p:transition spd="slow">
         <p:fade/>
       </p:transition>
@@ -23352,13 +23352,13 @@
   <p:clrMapOvr>
     <a:masterClrMapping/>
   </p:clrMapOvr>
-  <mc:AlternateContent xmlns:mc="http://schemas.openxmlformats.org/markup-compatibility/2006">
-    <mc:Choice xmlns:p159="http://schemas.microsoft.com/office/powerpoint/2015/09/main" Requires="p159">
+  <mc:AlternateContent xmlns:mc="http://schemas.openxmlformats.org/markup-compatibility/2006" xmlns:p159="http://schemas.microsoft.com/office/powerpoint/2015/09/main">
+    <mc:Choice Requires="p159">
       <p:transition spd="slow">
         <p159:morph option="byObject"/>
       </p:transition>
     </mc:Choice>
-    <mc:Fallback>
+    <mc:Fallback xmlns="">
       <p:transition spd="slow">
         <p:fade/>
       </p:transition>
@@ -23526,13 +23526,13 @@
   <p:clrMapOvr>
     <a:masterClrMapping/>
   </p:clrMapOvr>
-  <mc:AlternateContent xmlns:mc="http://schemas.openxmlformats.org/markup-compatibility/2006">
-    <mc:Choice xmlns:p159="http://schemas.microsoft.com/office/powerpoint/2015/09/main" Requires="p159">
+  <mc:AlternateContent xmlns:mc="http://schemas.openxmlformats.org/markup-compatibility/2006" xmlns:p159="http://schemas.microsoft.com/office/powerpoint/2015/09/main">
+    <mc:Choice Requires="p159">
       <p:transition spd="slow">
         <p159:morph option="byObject"/>
       </p:transition>
     </mc:Choice>
-    <mc:Fallback>
+    <mc:Fallback xmlns="">
       <p:transition spd="slow">
         <p:fade/>
       </p:transition>
@@ -26002,13 +26002,13 @@
   <p:clrMapOvr>
     <a:masterClrMapping/>
   </p:clrMapOvr>
-  <mc:AlternateContent xmlns:mc="http://schemas.openxmlformats.org/markup-compatibility/2006">
-    <mc:Choice xmlns:p159="http://schemas.microsoft.com/office/powerpoint/2015/09/main" Requires="p159">
+  <mc:AlternateContent xmlns:mc="http://schemas.openxmlformats.org/markup-compatibility/2006" xmlns:p159="http://schemas.microsoft.com/office/powerpoint/2015/09/main">
+    <mc:Choice Requires="p159">
       <p:transition spd="slow">
         <p159:morph option="byObject"/>
       </p:transition>
     </mc:Choice>
-    <mc:Fallback>
+    <mc:Fallback xmlns="">
       <p:transition spd="slow">
         <p:fade/>
       </p:transition>
@@ -26390,8 +26390,8 @@
         </p:nvSpPr>
         <p:spPr>
           <a:xfrm>
-            <a:off x="6573158" y="1716115"/>
-            <a:ext cx="6377306" cy="3729611"/>
+            <a:off x="6441746" y="2385016"/>
+            <a:ext cx="6377306" cy="3060710"/>
           </a:xfrm>
           <a:prstGeom prst="rect">
             <a:avLst/>
@@ -26403,26 +26403,6 @@
           </a:bodyPr>
           <a:lstStyle/>
           <a:p>
-            <a:pPr>
-              <a:lnSpc>
-                <a:spcPct val="115000"/>
-              </a:lnSpc>
-              <a:spcAft>
-                <a:spcPts val="800"/>
-              </a:spcAft>
-            </a:pPr>
-            <a:endParaRPr lang="zh-TW" altLang="zh-TW" sz="2800" b="1" kern="100" dirty="0">
-              <a:solidFill>
-                <a:schemeClr val="accent1">
-                  <a:lumMod val="75000"/>
-                </a:schemeClr>
-              </a:solidFill>
-              <a:effectLst/>
-              <a:latin typeface="+mn-ea"/>
-              <a:cs typeface="Times New Roman" panose="02020603050405020304" pitchFamily="18" charset="0"/>
-            </a:endParaRPr>
-          </a:p>
-          <a:p>
             <a:pPr marL="342900" lvl="0" indent="-342900">
               <a:lnSpc>
                 <a:spcPct val="115000"/>
@@ -26431,8 +26411,8 @@
                 <a:spcPts val="800"/>
               </a:spcAft>
               <a:buSzPts val="1000"/>
-              <a:buFont typeface="Symbol" panose="05050102010706020507" pitchFamily="18" charset="2"/>
-              <a:buChar char=""/>
+              <a:buFont typeface="Wingdings" panose="05000000000000000000" pitchFamily="2" charset="2"/>
+              <a:buChar char=""/>
               <a:tabLst>
                 <a:tab pos="457200" algn="l"/>
               </a:tabLst>
@@ -29006,6 +28986,15 @@
 </file>
 
 <file path=customXml/item1.xml><?xml version="1.0" encoding="utf-8"?>
+<?mso-contentType ?>
+<FormTemplates xmlns="http://schemas.microsoft.com/sharepoint/v3/contenttype/forms">
+  <Display>DocumentLibraryForm</Display>
+  <Edit>DocumentLibraryForm</Edit>
+  <New>DocumentLibraryForm</New>
+</FormTemplates>
+</file>
+
+<file path=customXml/item2.xml><?xml version="1.0" encoding="utf-8"?>
 <p:properties xmlns:p="http://schemas.microsoft.com/office/2006/metadata/properties" xmlns:xsi="http://www.w3.org/2001/XMLSchema-instance" xmlns:pc="http://schemas.microsoft.com/office/infopath/2007/PartnerControls">
   <documentManagement>
     <TaxCatchAll xmlns="0ba46b80-6b01-4346-9b2c-03da308a0634" xsi:nil="true"/>
@@ -29014,15 +29003,6 @@
     </lcf76f155ced4ddcb4097134ff3c332f>
   </documentManagement>
 </p:properties>
-</file>
-
-<file path=customXml/item2.xml><?xml version="1.0" encoding="utf-8"?>
-<?mso-contentType ?>
-<FormTemplates xmlns="http://schemas.microsoft.com/sharepoint/v3/contenttype/forms">
-  <Display>DocumentLibraryForm</Display>
-  <Edit>DocumentLibraryForm</Edit>
-  <New>DocumentLibraryForm</New>
-</FormTemplates>
 </file>
 
 <file path=customXml/item3.xml><?xml version="1.0" encoding="utf-8"?>
@@ -29215,20 +29195,20 @@
 </file>
 
 <file path=customXml/itemProps1.xml><?xml version="1.0" encoding="utf-8"?>
+<ds:datastoreItem xmlns:ds="http://schemas.openxmlformats.org/officeDocument/2006/customXml" ds:itemID="{04ECE26A-46C9-411F-8B9D-26BC5CDC55C0}">
+  <ds:schemaRefs>
+    <ds:schemaRef ds:uri="http://schemas.microsoft.com/sharepoint/v3/contenttype/forms"/>
+  </ds:schemaRefs>
+</ds:datastoreItem>
+</file>
+
+<file path=customXml/itemProps2.xml><?xml version="1.0" encoding="utf-8"?>
 <ds:datastoreItem xmlns:ds="http://schemas.openxmlformats.org/officeDocument/2006/customXml" ds:itemID="{8AAED483-C87A-4A4D-97D9-4D668F30684D}">
   <ds:schemaRefs>
     <ds:schemaRef ds:uri="http://schemas.microsoft.com/office/2006/metadata/properties"/>
     <ds:schemaRef ds:uri="http://schemas.microsoft.com/office/infopath/2007/PartnerControls"/>
     <ds:schemaRef ds:uri="0ba46b80-6b01-4346-9b2c-03da308a0634"/>
     <ds:schemaRef ds:uri="8a3f5d65-52d1-40ef-a941-5f46bf66d567"/>
-  </ds:schemaRefs>
-</ds:datastoreItem>
-</file>
-
-<file path=customXml/itemProps2.xml><?xml version="1.0" encoding="utf-8"?>
-<ds:datastoreItem xmlns:ds="http://schemas.openxmlformats.org/officeDocument/2006/customXml" ds:itemID="{04ECE26A-46C9-411F-8B9D-26BC5CDC55C0}">
-  <ds:schemaRefs>
-    <ds:schemaRef ds:uri="http://schemas.microsoft.com/sharepoint/v3/contenttype/forms"/>
   </ds:schemaRefs>
 </ds:datastoreItem>
 </file>

--- a/template.pptx
+++ b/template.pptx
@@ -10521,7 +10521,7 @@
           </a:lstStyle>
           <a:p>
             <a:fld id="{7C7898EE-D06A-48FC-AF05-8BC54DC9F027}" type="datetimeFigureOut">
-              <a:t>2026/3/16</a:t>
+              <a:t>2026/3/17</a:t>
             </a:fld>
             <a:endParaRPr lang="zh-TW" altLang="en-US"/>
           </a:p>
@@ -19455,7 +19455,7 @@
           <a:p>
             <a:fld id="{9275EF9D-446A-4BA9-9A8F-8795C824CFA3}" type="datetimeFigureOut">
               <a:rPr lang="zh-TW" altLang="en-US" smtClean="0"/>
-              <a:t>2026/3/16</a:t>
+              <a:t>2026/3/17</a:t>
             </a:fld>
             <a:endParaRPr lang="zh-TW" altLang="en-US"/>
           </a:p>
@@ -19889,14 +19889,14 @@
         <p:spPr>
           <a:xfrm>
             <a:off x="6096000" y="3438026"/>
-            <a:ext cx="5990512" cy="430887"/>
+            <a:ext cx="4505608" cy="430887"/>
           </a:xfrm>
           <a:prstGeom prst="rect">
             <a:avLst/>
           </a:prstGeom>
         </p:spPr>
         <p:txBody>
-          <a:bodyPr lIns="0" tIns="0" rIns="0" bIns="0" rtlCol="0" anchor="t">
+          <a:bodyPr wrap="square" lIns="0" tIns="0" rIns="0" bIns="0" rtlCol="0" anchor="t">
             <a:spAutoFit/>
           </a:bodyPr>
           <a:lstStyle/>
@@ -20169,8 +20169,8 @@
         </p:nvSpPr>
         <p:spPr>
           <a:xfrm>
-            <a:off x="4016395" y="2153929"/>
-            <a:ext cx="4394602" cy="471091"/>
+            <a:off x="2172832" y="2153929"/>
+            <a:ext cx="7785980" cy="471091"/>
           </a:xfrm>
           <a:prstGeom prst="rect">
             <a:avLst/>
@@ -20182,7 +20182,7 @@
           </a:bodyPr>
           <a:lstStyle/>
           <a:p>
-            <a:pPr>
+            <a:pPr algn="ctr">
               <a:lnSpc>
                 <a:spcPct val="115000"/>
               </a:lnSpc>
@@ -20228,8 +20228,8 @@
         </p:nvSpPr>
         <p:spPr>
           <a:xfrm>
-            <a:off x="3640587" y="3049544"/>
-            <a:ext cx="5146217" cy="1975477"/>
+            <a:off x="2172832" y="3049544"/>
+            <a:ext cx="7623017" cy="1550746"/>
           </a:xfrm>
           <a:prstGeom prst="rect">
             <a:avLst/>
@@ -22195,8 +22195,8 @@
         </p:nvSpPr>
         <p:spPr>
           <a:xfrm>
-            <a:off x="6787947" y="3713859"/>
-            <a:ext cx="4712305" cy="2554545"/>
+            <a:off x="6787948" y="3713859"/>
+            <a:ext cx="4546992" cy="2554545"/>
           </a:xfrm>
           <a:prstGeom prst="rect">
             <a:avLst/>
@@ -22809,7 +22809,7 @@
         </p:nvSpPr>
         <p:spPr>
           <a:xfrm>
-            <a:off x="585923" y="3713859"/>
+            <a:off x="284149" y="3715797"/>
             <a:ext cx="4712305" cy="2554545"/>
           </a:xfrm>
           <a:prstGeom prst="rect">
@@ -24705,7 +24705,7 @@
         <p:spPr>
           <a:xfrm>
             <a:off x="550332" y="2768762"/>
-            <a:ext cx="3415085" cy="1938992"/>
+            <a:ext cx="2853771" cy="1938992"/>
           </a:xfrm>
           <a:prstGeom prst="rect">
             <a:avLst/>
@@ -25559,7 +25559,7 @@
         <p:spPr>
           <a:xfrm>
             <a:off x="611414" y="2583845"/>
-            <a:ext cx="3415085" cy="1938992"/>
+            <a:ext cx="2828903" cy="1938992"/>
           </a:xfrm>
           <a:prstGeom prst="rect">
             <a:avLst/>
@@ -26391,7 +26391,7 @@
         <p:spPr>
           <a:xfrm>
             <a:off x="6441746" y="2385016"/>
-            <a:ext cx="6377306" cy="3060710"/>
+            <a:ext cx="4820765" cy="3060710"/>
           </a:xfrm>
           <a:prstGeom prst="rect">
             <a:avLst/>
@@ -28986,15 +28986,6 @@
 </file>
 
 <file path=customXml/item1.xml><?xml version="1.0" encoding="utf-8"?>
-<?mso-contentType ?>
-<FormTemplates xmlns="http://schemas.microsoft.com/sharepoint/v3/contenttype/forms">
-  <Display>DocumentLibraryForm</Display>
-  <Edit>DocumentLibraryForm</Edit>
-  <New>DocumentLibraryForm</New>
-</FormTemplates>
-</file>
-
-<file path=customXml/item2.xml><?xml version="1.0" encoding="utf-8"?>
 <p:properties xmlns:p="http://schemas.microsoft.com/office/2006/metadata/properties" xmlns:xsi="http://www.w3.org/2001/XMLSchema-instance" xmlns:pc="http://schemas.microsoft.com/office/infopath/2007/PartnerControls">
   <documentManagement>
     <TaxCatchAll xmlns="0ba46b80-6b01-4346-9b2c-03da308a0634" xsi:nil="true"/>
@@ -29003,6 +28994,15 @@
     </lcf76f155ced4ddcb4097134ff3c332f>
   </documentManagement>
 </p:properties>
+</file>
+
+<file path=customXml/item2.xml><?xml version="1.0" encoding="utf-8"?>
+<?mso-contentType ?>
+<FormTemplates xmlns="http://schemas.microsoft.com/sharepoint/v3/contenttype/forms">
+  <Display>DocumentLibraryForm</Display>
+  <Edit>DocumentLibraryForm</Edit>
+  <New>DocumentLibraryForm</New>
+</FormTemplates>
 </file>
 
 <file path=customXml/item3.xml><?xml version="1.0" encoding="utf-8"?>
@@ -29195,20 +29195,20 @@
 </file>
 
 <file path=customXml/itemProps1.xml><?xml version="1.0" encoding="utf-8"?>
-<ds:datastoreItem xmlns:ds="http://schemas.openxmlformats.org/officeDocument/2006/customXml" ds:itemID="{04ECE26A-46C9-411F-8B9D-26BC5CDC55C0}">
-  <ds:schemaRefs>
-    <ds:schemaRef ds:uri="http://schemas.microsoft.com/sharepoint/v3/contenttype/forms"/>
-  </ds:schemaRefs>
-</ds:datastoreItem>
-</file>
-
-<file path=customXml/itemProps2.xml><?xml version="1.0" encoding="utf-8"?>
 <ds:datastoreItem xmlns:ds="http://schemas.openxmlformats.org/officeDocument/2006/customXml" ds:itemID="{8AAED483-C87A-4A4D-97D9-4D668F30684D}">
   <ds:schemaRefs>
     <ds:schemaRef ds:uri="http://schemas.microsoft.com/office/2006/metadata/properties"/>
     <ds:schemaRef ds:uri="http://schemas.microsoft.com/office/infopath/2007/PartnerControls"/>
     <ds:schemaRef ds:uri="0ba46b80-6b01-4346-9b2c-03da308a0634"/>
     <ds:schemaRef ds:uri="8a3f5d65-52d1-40ef-a941-5f46bf66d567"/>
+  </ds:schemaRefs>
+</ds:datastoreItem>
+</file>
+
+<file path=customXml/itemProps2.xml><?xml version="1.0" encoding="utf-8"?>
+<ds:datastoreItem xmlns:ds="http://schemas.openxmlformats.org/officeDocument/2006/customXml" ds:itemID="{04ECE26A-46C9-411F-8B9D-26BC5CDC55C0}">
+  <ds:schemaRefs>
+    <ds:schemaRef ds:uri="http://schemas.microsoft.com/sharepoint/v3/contenttype/forms"/>
   </ds:schemaRefs>
 </ds:datastoreItem>
 </file>

--- a/template.pptx
+++ b/template.pptx
@@ -5,7 +5,7 @@
     <p:sldMasterId id="2147483660" r:id="rId4"/>
   </p:sldMasterIdLst>
   <p:notesMasterIdLst>
-    <p:notesMasterId r:id="rId22"/>
+    <p:notesMasterId r:id="rId23"/>
   </p:notesMasterIdLst>
   <p:sldIdLst>
     <p:sldId id="343" r:id="rId5"/>
@@ -13,18 +13,19 @@
     <p:sldId id="291" r:id="rId7"/>
     <p:sldId id="340" r:id="rId8"/>
     <p:sldId id="370" r:id="rId9"/>
-    <p:sldId id="342" r:id="rId10"/>
-    <p:sldId id="354" r:id="rId11"/>
-    <p:sldId id="367" r:id="rId12"/>
-    <p:sldId id="356" r:id="rId13"/>
-    <p:sldId id="371" r:id="rId14"/>
-    <p:sldId id="357" r:id="rId15"/>
-    <p:sldId id="363" r:id="rId16"/>
-    <p:sldId id="365" r:id="rId17"/>
-    <p:sldId id="366" r:id="rId18"/>
-    <p:sldId id="368" r:id="rId19"/>
-    <p:sldId id="369" r:id="rId20"/>
-    <p:sldId id="352" r:id="rId21"/>
+    <p:sldId id="372" r:id="rId10"/>
+    <p:sldId id="342" r:id="rId11"/>
+    <p:sldId id="354" r:id="rId12"/>
+    <p:sldId id="367" r:id="rId13"/>
+    <p:sldId id="356" r:id="rId14"/>
+    <p:sldId id="371" r:id="rId15"/>
+    <p:sldId id="357" r:id="rId16"/>
+    <p:sldId id="363" r:id="rId17"/>
+    <p:sldId id="365" r:id="rId18"/>
+    <p:sldId id="366" r:id="rId19"/>
+    <p:sldId id="368" r:id="rId20"/>
+    <p:sldId id="369" r:id="rId21"/>
+    <p:sldId id="352" r:id="rId22"/>
   </p:sldIdLst>
   <p:sldSz cx="12192000" cy="6858000"/>
   <p:notesSz cx="6858000" cy="9144000"/>
@@ -133,6 +134,7 @@
             <p14:sldId id="291"/>
             <p14:sldId id="340"/>
             <p14:sldId id="370"/>
+            <p14:sldId id="372"/>
             <p14:sldId id="342"/>
             <p14:sldId id="354"/>
             <p14:sldId id="367"/>
@@ -10521,7 +10523,7 @@
           </a:lstStyle>
           <a:p>
             <a:fld id="{7C7898EE-D06A-48FC-AF05-8BC54DC9F027}" type="datetimeFigureOut">
-              <a:t>2026/3/17</a:t>
+              <a:t>2026/3/25</a:t>
             </a:fld>
             <a:endParaRPr lang="zh-TW" altLang="en-US"/>
           </a:p>
@@ -10856,7 +10858,7 @@
           <a:p>
             <a:fld id="{E10BFFEF-1ECD-4E53-B114-84AF206B72CD}" type="slidenum">
               <a:rPr lang="en-US" altLang="zh-TW"/>
-              <a:t>17</a:t>
+              <a:t>18</a:t>
             </a:fld>
             <a:endParaRPr lang="zh-TW" altLang="en-US"/>
           </a:p>
@@ -19455,7 +19457,7 @@
           <a:p>
             <a:fld id="{9275EF9D-446A-4BA9-9A8F-8795C824CFA3}" type="datetimeFigureOut">
               <a:rPr lang="zh-TW" altLang="en-US" smtClean="0"/>
-              <a:t>2026/3/17</a:t>
+              <a:t>2026/3/25</a:t>
             </a:fld>
             <a:endParaRPr lang="zh-TW" altLang="en-US"/>
           </a:p>
@@ -20071,6 +20073,370 @@
           <a:chExt cx="0" cy="0"/>
         </a:xfrm>
       </p:grpSpPr>
+      <p:sp>
+        <p:nvSpPr>
+          <p:cNvPr id="6" name="矩形: 剪去同側角落 5">
+            <a:extLst>
+              <a:ext uri="{FF2B5EF4-FFF2-40B4-BE49-F238E27FC236}">
+                <a16:creationId xmlns:a16="http://schemas.microsoft.com/office/drawing/2014/main" id="{7DD451AF-4BE3-F133-220D-15D8F4777B7F}"/>
+              </a:ext>
+            </a:extLst>
+          </p:cNvPr>
+          <p:cNvSpPr>
+            <a:spLocks noGrp="1" noRot="1" noMove="1" noResize="1" noEditPoints="1" noAdjustHandles="1" noChangeArrowheads="1" noChangeShapeType="1"/>
+          </p:cNvSpPr>
+          <p:nvPr/>
+        </p:nvSpPr>
+        <p:spPr>
+          <a:xfrm rot="5400000">
+            <a:off x="1803043" y="-1574799"/>
+            <a:ext cx="630936" cy="4237022"/>
+          </a:xfrm>
+          <a:prstGeom prst="snip2SameRect">
+            <a:avLst/>
+          </a:prstGeom>
+          <a:ln>
+            <a:noFill/>
+          </a:ln>
+        </p:spPr>
+        <p:style>
+          <a:lnRef idx="2">
+            <a:schemeClr val="accent1">
+              <a:shade val="15000"/>
+            </a:schemeClr>
+          </a:lnRef>
+          <a:fillRef idx="1">
+            <a:schemeClr val="accent1"/>
+          </a:fillRef>
+          <a:effectRef idx="0">
+            <a:schemeClr val="accent1"/>
+          </a:effectRef>
+          <a:fontRef idx="minor">
+            <a:schemeClr val="lt1"/>
+          </a:fontRef>
+        </p:style>
+        <p:txBody>
+          <a:bodyPr rtlCol="0" anchor="ctr"/>
+          <a:lstStyle/>
+          <a:p>
+            <a:pPr algn="ctr"/>
+            <a:endParaRPr lang="zh-TW" altLang="en-US"/>
+          </a:p>
+        </p:txBody>
+      </p:sp>
+      <p:sp>
+        <p:nvSpPr>
+          <p:cNvPr id="7" name="title">
+            <a:extLst>
+              <a:ext uri="{FF2B5EF4-FFF2-40B4-BE49-F238E27FC236}">
+                <a16:creationId xmlns:a16="http://schemas.microsoft.com/office/drawing/2014/main" id="{4D295F0A-4B33-7EE4-3A92-97EB6962CF5D}"/>
+              </a:ext>
+            </a:extLst>
+          </p:cNvPr>
+          <p:cNvSpPr txBox="1"/>
+          <p:nvPr/>
+        </p:nvSpPr>
+        <p:spPr>
+          <a:xfrm>
+            <a:off x="276986" y="281007"/>
+            <a:ext cx="4394602" cy="471091"/>
+          </a:xfrm>
+          <a:prstGeom prst="rect">
+            <a:avLst/>
+          </a:prstGeom>
+        </p:spPr>
+        <p:txBody>
+          <a:bodyPr wrap="square" lIns="0" tIns="0" rIns="0" bIns="0" rtlCol="0" anchor="t">
+            <a:spAutoFit/>
+          </a:bodyPr>
+          <a:lstStyle/>
+          <a:p>
+            <a:pPr>
+              <a:lnSpc>
+                <a:spcPct val="115000"/>
+              </a:lnSpc>
+              <a:spcAft>
+                <a:spcPts val="800"/>
+              </a:spcAft>
+            </a:pPr>
+            <a:r>
+              <a:rPr lang="en-US" altLang="zh-TW" sz="2800" b="1" kern="100" dirty="0">
+                <a:solidFill>
+                  <a:schemeClr val="bg1"/>
+                </a:solidFill>
+                <a:effectLst/>
+                <a:latin typeface="Aptos" panose="020B0004020202020204" pitchFamily="34" charset="0"/>
+                <a:ea typeface="新細明體" panose="02020500000000000000" pitchFamily="18" charset="-120"/>
+                <a:cs typeface="Times New Roman" panose="02020603050405020304" pitchFamily="18" charset="0"/>
+              </a:rPr>
+              <a:t>Decoupling capacitors</a:t>
+            </a:r>
+            <a:endParaRPr lang="zh-TW" altLang="zh-TW" sz="2800" kern="100" dirty="0">
+              <a:solidFill>
+                <a:schemeClr val="bg1"/>
+              </a:solidFill>
+              <a:effectLst/>
+              <a:latin typeface="Aptos" panose="020B0004020202020204" pitchFamily="34" charset="0"/>
+              <a:ea typeface="新細明體" panose="02020500000000000000" pitchFamily="18" charset="-120"/>
+              <a:cs typeface="Times New Roman" panose="02020603050405020304" pitchFamily="18" charset="0"/>
+            </a:endParaRPr>
+          </a:p>
+        </p:txBody>
+      </p:sp>
+      <p:sp>
+        <p:nvSpPr>
+          <p:cNvPr id="9" name="content">
+            <a:extLst>
+              <a:ext uri="{FF2B5EF4-FFF2-40B4-BE49-F238E27FC236}">
+                <a16:creationId xmlns:a16="http://schemas.microsoft.com/office/drawing/2014/main" id="{B328E9C1-4D32-5B78-02D9-93DA0D3A1E85}"/>
+              </a:ext>
+            </a:extLst>
+          </p:cNvPr>
+          <p:cNvSpPr txBox="1"/>
+          <p:nvPr/>
+        </p:nvSpPr>
+        <p:spPr>
+          <a:xfrm>
+            <a:off x="877355" y="1650275"/>
+            <a:ext cx="5146217" cy="3557449"/>
+          </a:xfrm>
+          <a:prstGeom prst="rect">
+            <a:avLst/>
+          </a:prstGeom>
+          <a:noFill/>
+        </p:spPr>
+        <p:txBody>
+          <a:bodyPr wrap="square">
+            <a:spAutoFit/>
+          </a:bodyPr>
+          <a:lstStyle/>
+          <a:p>
+            <a:pPr>
+              <a:lnSpc>
+                <a:spcPct val="115000"/>
+              </a:lnSpc>
+              <a:spcAft>
+                <a:spcPts val="800"/>
+              </a:spcAft>
+            </a:pPr>
+            <a:r>
+              <a:rPr lang="en-US" altLang="zh-TW" sz="2400" b="1" kern="100" dirty="0">
+                <a:effectLst/>
+                <a:latin typeface="Aptos" panose="020B0004020202020204" pitchFamily="34" charset="0"/>
+                <a:ea typeface="新細明體" panose="02020500000000000000" pitchFamily="18" charset="-120"/>
+                <a:cs typeface="Times New Roman" panose="02020603050405020304" pitchFamily="18" charset="0"/>
+              </a:rPr>
+              <a:t>Near every IC, Why?</a:t>
+            </a:r>
+          </a:p>
+          <a:p>
+            <a:pPr marL="342900" lvl="0" indent="-342900">
+              <a:lnSpc>
+                <a:spcPct val="115000"/>
+              </a:lnSpc>
+              <a:spcAft>
+                <a:spcPts val="800"/>
+              </a:spcAft>
+              <a:buSzPts val="1000"/>
+              <a:buFont typeface="Symbol" panose="05050102010706020507" pitchFamily="18" charset="2"/>
+              <a:buChar char=""/>
+              <a:tabLst>
+                <a:tab pos="457200" algn="l"/>
+              </a:tabLst>
+            </a:pPr>
+            <a:r>
+              <a:rPr lang="en-US" altLang="zh-TW" sz="2400" kern="100" dirty="0">
+                <a:effectLst/>
+                <a:latin typeface="Aptos" panose="020B0004020202020204" pitchFamily="34" charset="0"/>
+                <a:ea typeface="新細明體" panose="02020500000000000000" pitchFamily="18" charset="-120"/>
+                <a:cs typeface="Times New Roman" panose="02020603050405020304" pitchFamily="18" charset="0"/>
+              </a:rPr>
+              <a:t>ICs need stable voltage</a:t>
+            </a:r>
+            <a:endParaRPr lang="zh-TW" altLang="zh-TW" sz="2400" kern="100" dirty="0">
+              <a:effectLst/>
+              <a:latin typeface="Aptos" panose="020B0004020202020204" pitchFamily="34" charset="0"/>
+              <a:ea typeface="新細明體" panose="02020500000000000000" pitchFamily="18" charset="-120"/>
+              <a:cs typeface="Times New Roman" panose="02020603050405020304" pitchFamily="18" charset="0"/>
+            </a:endParaRPr>
+          </a:p>
+          <a:p>
+            <a:pPr marL="342900" lvl="0" indent="-342900">
+              <a:lnSpc>
+                <a:spcPct val="115000"/>
+              </a:lnSpc>
+              <a:spcAft>
+                <a:spcPts val="800"/>
+              </a:spcAft>
+              <a:buSzPts val="1000"/>
+              <a:buFont typeface="Symbol" panose="05050102010706020507" pitchFamily="18" charset="2"/>
+              <a:buChar char=""/>
+              <a:tabLst>
+                <a:tab pos="457200" algn="l"/>
+              </a:tabLst>
+            </a:pPr>
+            <a:r>
+              <a:rPr lang="en-US" altLang="zh-TW" sz="2400" kern="100" dirty="0">
+                <a:effectLst/>
+                <a:latin typeface="Aptos" panose="020B0004020202020204" pitchFamily="34" charset="0"/>
+                <a:ea typeface="新細明體" panose="02020500000000000000" pitchFamily="18" charset="-120"/>
+                <a:cs typeface="Times New Roman" panose="02020603050405020304" pitchFamily="18" charset="0"/>
+              </a:rPr>
+              <a:t>Capacitors absorb noise and spikes</a:t>
+            </a:r>
+          </a:p>
+          <a:p>
+            <a:pPr marL="342900" lvl="0" indent="-342900">
+              <a:lnSpc>
+                <a:spcPct val="115000"/>
+              </a:lnSpc>
+              <a:spcAft>
+                <a:spcPts val="800"/>
+              </a:spcAft>
+              <a:buSzPts val="1000"/>
+              <a:buFont typeface="Symbol" panose="05050102010706020507" pitchFamily="18" charset="2"/>
+              <a:buChar char=""/>
+              <a:tabLst>
+                <a:tab pos="457200" algn="l"/>
+              </a:tabLst>
+            </a:pPr>
+            <a:endParaRPr lang="zh-TW" altLang="zh-TW" sz="2400" kern="100" dirty="0">
+              <a:effectLst/>
+              <a:latin typeface="Aptos" panose="020B0004020202020204" pitchFamily="34" charset="0"/>
+              <a:ea typeface="新細明體" panose="02020500000000000000" pitchFamily="18" charset="-120"/>
+              <a:cs typeface="Times New Roman" panose="02020603050405020304" pitchFamily="18" charset="0"/>
+            </a:endParaRPr>
+          </a:p>
+          <a:p>
+            <a:pPr>
+              <a:lnSpc>
+                <a:spcPct val="115000"/>
+              </a:lnSpc>
+              <a:spcAft>
+                <a:spcPts val="800"/>
+              </a:spcAft>
+            </a:pPr>
+            <a:r>
+              <a:rPr lang="en-US" altLang="zh-TW" sz="2400" kern="100" dirty="0">
+                <a:effectLst/>
+                <a:latin typeface="Aptos" panose="020B0004020202020204" pitchFamily="34" charset="0"/>
+                <a:ea typeface="新細明體" panose="02020500000000000000" pitchFamily="18" charset="-120"/>
+                <a:cs typeface="Times New Roman" panose="02020603050405020304" pitchFamily="18" charset="0"/>
+              </a:rPr>
+              <a:t>Beginner takeaway:</a:t>
+            </a:r>
+            <a:endParaRPr lang="zh-TW" altLang="zh-TW" sz="2400" kern="100" dirty="0">
+              <a:effectLst/>
+              <a:latin typeface="Aptos" panose="020B0004020202020204" pitchFamily="34" charset="0"/>
+              <a:ea typeface="新細明體" panose="02020500000000000000" pitchFamily="18" charset="-120"/>
+              <a:cs typeface="Times New Roman" panose="02020603050405020304" pitchFamily="18" charset="0"/>
+            </a:endParaRPr>
+          </a:p>
+          <a:p>
+            <a:pPr>
+              <a:lnSpc>
+                <a:spcPct val="115000"/>
+              </a:lnSpc>
+              <a:spcAft>
+                <a:spcPts val="800"/>
+              </a:spcAft>
+            </a:pPr>
+            <a:r>
+              <a:rPr lang="en-US" altLang="zh-TW" sz="2400" kern="100" dirty="0">
+                <a:effectLst/>
+                <a:latin typeface="Aptos" panose="020B0004020202020204" pitchFamily="34" charset="0"/>
+                <a:ea typeface="新細明體" panose="02020500000000000000" pitchFamily="18" charset="-120"/>
+                <a:cs typeface="Times New Roman" panose="02020603050405020304" pitchFamily="18" charset="0"/>
+              </a:rPr>
+              <a:t>Capacitors are “local energy buffers”</a:t>
+            </a:r>
+            <a:endParaRPr lang="zh-TW" altLang="zh-TW" sz="2400" kern="100" dirty="0">
+              <a:effectLst/>
+              <a:latin typeface="Aptos" panose="020B0004020202020204" pitchFamily="34" charset="0"/>
+              <a:ea typeface="新細明體" panose="02020500000000000000" pitchFamily="18" charset="-120"/>
+              <a:cs typeface="Times New Roman" panose="02020603050405020304" pitchFamily="18" charset="0"/>
+            </a:endParaRPr>
+          </a:p>
+        </p:txBody>
+      </p:sp>
+      <p:pic>
+        <p:nvPicPr>
+          <p:cNvPr id="13" name="img" descr="一張含有 電子產品, 電路, 電子元件, 電路元件 的圖片&#10;&#10;AI 產生的內容可能不正確。">
+            <a:extLst>
+              <a:ext uri="{FF2B5EF4-FFF2-40B4-BE49-F238E27FC236}">
+                <a16:creationId xmlns:a16="http://schemas.microsoft.com/office/drawing/2014/main" id="{D05F9D7F-CA52-F6F8-435B-90A6E7480AD5}"/>
+              </a:ext>
+            </a:extLst>
+          </p:cNvPr>
+          <p:cNvPicPr>
+            <a:picLocks noChangeAspect="1"/>
+          </p:cNvPicPr>
+          <p:nvPr/>
+        </p:nvPicPr>
+        <p:blipFill>
+          <a:blip r:embed="rId2">
+            <a:extLst>
+              <a:ext uri="{28A0092B-C50C-407E-A947-70E740481C1C}">
+                <a14:useLocalDpi xmlns:a14="http://schemas.microsoft.com/office/drawing/2010/main" val="0"/>
+              </a:ext>
+            </a:extLst>
+          </a:blip>
+          <a:stretch>
+            <a:fillRect/>
+          </a:stretch>
+        </p:blipFill>
+        <p:spPr>
+          <a:xfrm>
+            <a:off x="6655202" y="1850356"/>
+            <a:ext cx="4750963" cy="3157286"/>
+          </a:xfrm>
+          <a:prstGeom prst="rect">
+            <a:avLst/>
+          </a:prstGeom>
+        </p:spPr>
+      </p:pic>
+    </p:spTree>
+    <p:extLst>
+      <p:ext uri="{BB962C8B-B14F-4D97-AF65-F5344CB8AC3E}">
+        <p14:creationId xmlns:p14="http://schemas.microsoft.com/office/powerpoint/2010/main" val="1882002090"/>
+      </p:ext>
+    </p:extLst>
+  </p:cSld>
+  <p:clrMapOvr>
+    <a:masterClrMapping/>
+  </p:clrMapOvr>
+  <mc:AlternateContent xmlns:mc="http://schemas.openxmlformats.org/markup-compatibility/2006" xmlns:p159="http://schemas.microsoft.com/office/powerpoint/2015/09/main">
+    <mc:Choice Requires="p159">
+      <p:transition spd="slow">
+        <p159:morph option="byObject"/>
+      </p:transition>
+    </mc:Choice>
+    <mc:Fallback xmlns="">
+      <p:transition spd="slow">
+        <p:fade/>
+      </p:transition>
+    </mc:Fallback>
+  </mc:AlternateContent>
+</p:sld>
+</file>
+
+<file path=ppt/slides/slide11.xml><?xml version="1.0" encoding="utf-8"?>
+<p:sld xmlns:a="http://schemas.openxmlformats.org/drawingml/2006/main" xmlns:r="http://schemas.openxmlformats.org/officeDocument/2006/relationships" xmlns:p="http://schemas.openxmlformats.org/presentationml/2006/main">
+  <p:cSld>
+    <p:spTree>
+      <p:nvGrpSpPr>
+        <p:cNvPr id="1" name=""/>
+        <p:cNvGrpSpPr/>
+        <p:nvPr/>
+      </p:nvGrpSpPr>
+      <p:grpSpPr>
+        <a:xfrm>
+          <a:off x="0" y="0"/>
+          <a:ext cx="0" cy="0"/>
+          <a:chOff x="0" y="0"/>
+          <a:chExt cx="0" cy="0"/>
+        </a:xfrm>
+      </p:grpSpPr>
       <p:pic>
         <p:nvPicPr>
           <p:cNvPr id="10" name="圖片 9">
@@ -20343,7 +20709,7 @@
 </p:sld>
 </file>
 
-<file path=ppt/slides/slide11.xml><?xml version="1.0" encoding="utf-8"?>
+<file path=ppt/slides/slide12.xml><?xml version="1.0" encoding="utf-8"?>
 <p:sld xmlns:a="http://schemas.openxmlformats.org/drawingml/2006/main" xmlns:r="http://schemas.openxmlformats.org/officeDocument/2006/relationships" xmlns:p="http://schemas.openxmlformats.org/presentationml/2006/main">
   <p:cSld>
     <p:spTree>
@@ -20418,7 +20784,9 @@
               </a:ext>
             </a:extLst>
           </p:cNvPr>
-          <p:cNvSpPr txBox="1"/>
+          <p:cNvSpPr txBox="1">
+            <a:spLocks noGrp="1" noRot="1" noMove="1" noResize="1" noEditPoints="1" noAdjustHandles="1" noChangeArrowheads="1" noChangeShapeType="1"/>
+          </p:cNvSpPr>
           <p:nvPr/>
         </p:nvSpPr>
         <p:spPr>
@@ -20964,7 +21332,9 @@
               </a:ext>
             </a:extLst>
           </p:cNvPr>
-          <p:cNvSpPr txBox="1"/>
+          <p:cNvSpPr txBox="1">
+            <a:spLocks noGrp="1" noRot="1" noMove="1" noResize="1" noEditPoints="1" noAdjustHandles="1" noChangeArrowheads="1" noChangeShapeType="1"/>
+          </p:cNvSpPr>
           <p:nvPr/>
         </p:nvSpPr>
         <p:spPr>
@@ -21034,7 +21404,7 @@
 </p:sld>
 </file>
 
-<file path=ppt/slides/slide12.xml><?xml version="1.0" encoding="utf-8"?>
+<file path=ppt/slides/slide13.xml><?xml version="1.0" encoding="utf-8"?>
 <p:sld xmlns:a="http://schemas.openxmlformats.org/drawingml/2006/main" xmlns:r="http://schemas.openxmlformats.org/officeDocument/2006/relationships" xmlns:p="http://schemas.openxmlformats.org/presentationml/2006/main">
   <p:cSld>
     <p:spTree>
@@ -21810,7 +22180,7 @@
 </p:sld>
 </file>
 
-<file path=ppt/slides/slide13.xml><?xml version="1.0" encoding="utf-8"?>
+<file path=ppt/slides/slide14.xml><?xml version="1.0" encoding="utf-8"?>
 <p:sld xmlns:a="http://schemas.openxmlformats.org/drawingml/2006/main" xmlns:r="http://schemas.openxmlformats.org/officeDocument/2006/relationships" xmlns:p="http://schemas.openxmlformats.org/presentationml/2006/main">
   <p:cSld>
     <p:spTree>
@@ -21885,7 +22255,9 @@
               </a:ext>
             </a:extLst>
           </p:cNvPr>
-          <p:cNvSpPr txBox="1"/>
+          <p:cNvSpPr txBox="1">
+            <a:spLocks noGrp="1" noRot="1" noMove="1" noResize="1" noEditPoints="1" noAdjustHandles="1" noChangeArrowheads="1" noChangeShapeType="1"/>
+          </p:cNvSpPr>
           <p:nvPr/>
         </p:nvSpPr>
         <p:spPr>
@@ -22431,7 +22803,9 @@
               </a:ext>
             </a:extLst>
           </p:cNvPr>
-          <p:cNvSpPr txBox="1"/>
+          <p:cNvSpPr txBox="1">
+            <a:spLocks noGrp="1" noRot="1" noMove="1" noResize="1" noEditPoints="1" noAdjustHandles="1" noChangeArrowheads="1" noChangeShapeType="1"/>
+          </p:cNvSpPr>
           <p:nvPr/>
         </p:nvSpPr>
         <p:spPr>
@@ -22485,13 +22859,15 @@
               </a:ext>
             </a:extLst>
           </p:cNvPr>
-          <p:cNvSpPr txBox="1"/>
+          <p:cNvSpPr txBox="1">
+            <a:spLocks noGrp="1" noRot="1" noMove="1" noResize="1" noEditPoints="1" noAdjustHandles="1" noChangeArrowheads="1" noChangeShapeType="1"/>
+          </p:cNvSpPr>
           <p:nvPr/>
         </p:nvSpPr>
         <p:spPr>
           <a:xfrm rot="5400000">
-            <a:off x="4856543" y="1498450"/>
-            <a:ext cx="3315198" cy="496098"/>
+            <a:off x="4989202" y="1365791"/>
+            <a:ext cx="3049880" cy="496098"/>
           </a:xfrm>
           <a:prstGeom prst="rect">
             <a:avLst/>
@@ -22545,7 +22921,9 @@
               </a:ext>
             </a:extLst>
           </p:cNvPr>
-          <p:cNvSpPr txBox="1"/>
+          <p:cNvSpPr txBox="1">
+            <a:spLocks noGrp="1" noRot="1" noMove="1" noResize="1" noEditPoints="1" noAdjustHandles="1" noChangeArrowheads="1" noChangeShapeType="1"/>
+          </p:cNvSpPr>
           <p:nvPr/>
         </p:nvSpPr>
         <p:spPr>
@@ -22998,180 +23376,6 @@
     <p:extLst>
       <p:ext uri="{BB962C8B-B14F-4D97-AF65-F5344CB8AC3E}">
         <p14:creationId xmlns:p14="http://schemas.microsoft.com/office/powerpoint/2010/main" val="1742541883"/>
-      </p:ext>
-    </p:extLst>
-  </p:cSld>
-  <p:clrMapOvr>
-    <a:masterClrMapping/>
-  </p:clrMapOvr>
-  <mc:AlternateContent xmlns:mc="http://schemas.openxmlformats.org/markup-compatibility/2006" xmlns:p159="http://schemas.microsoft.com/office/powerpoint/2015/09/main">
-    <mc:Choice Requires="p159">
-      <p:transition spd="slow">
-        <p159:morph option="byObject"/>
-      </p:transition>
-    </mc:Choice>
-    <mc:Fallback xmlns="">
-      <p:transition spd="slow">
-        <p:fade/>
-      </p:transition>
-    </mc:Fallback>
-  </mc:AlternateContent>
-</p:sld>
-</file>
-
-<file path=ppt/slides/slide14.xml><?xml version="1.0" encoding="utf-8"?>
-<p:sld xmlns:a="http://schemas.openxmlformats.org/drawingml/2006/main" xmlns:r="http://schemas.openxmlformats.org/officeDocument/2006/relationships" xmlns:p="http://schemas.openxmlformats.org/presentationml/2006/main">
-  <p:cSld>
-    <p:spTree>
-      <p:nvGrpSpPr>
-        <p:cNvPr id="1" name=""/>
-        <p:cNvGrpSpPr/>
-        <p:nvPr/>
-      </p:nvGrpSpPr>
-      <p:grpSpPr>
-        <a:xfrm>
-          <a:off x="0" y="0"/>
-          <a:ext cx="0" cy="0"/>
-          <a:chOff x="0" y="0"/>
-          <a:chExt cx="0" cy="0"/>
-        </a:xfrm>
-      </p:grpSpPr>
-      <p:sp>
-        <p:nvSpPr>
-          <p:cNvPr id="2" name="矩形: 剪去同側角落 1">
-            <a:extLst>
-              <a:ext uri="{FF2B5EF4-FFF2-40B4-BE49-F238E27FC236}">
-                <a16:creationId xmlns:a16="http://schemas.microsoft.com/office/drawing/2014/main" id="{B75BE523-0625-07DE-3900-9DA5D3F70815}"/>
-              </a:ext>
-            </a:extLst>
-          </p:cNvPr>
-          <p:cNvSpPr>
-            <a:spLocks noGrp="1" noRot="1" noMove="1" noResize="1" noEditPoints="1" noAdjustHandles="1" noChangeArrowheads="1" noChangeShapeType="1"/>
-          </p:cNvSpPr>
-          <p:nvPr/>
-        </p:nvSpPr>
-        <p:spPr>
-          <a:xfrm rot="5400000">
-            <a:off x="667512" y="-439268"/>
-            <a:ext cx="630936" cy="1965960"/>
-          </a:xfrm>
-          <a:prstGeom prst="snip2SameRect">
-            <a:avLst/>
-          </a:prstGeom>
-          <a:ln>
-            <a:noFill/>
-          </a:ln>
-        </p:spPr>
-        <p:style>
-          <a:lnRef idx="2">
-            <a:schemeClr val="accent1">
-              <a:shade val="15000"/>
-            </a:schemeClr>
-          </a:lnRef>
-          <a:fillRef idx="1">
-            <a:schemeClr val="accent1"/>
-          </a:fillRef>
-          <a:effectRef idx="0">
-            <a:schemeClr val="accent1"/>
-          </a:effectRef>
-          <a:fontRef idx="minor">
-            <a:schemeClr val="lt1"/>
-          </a:fontRef>
-        </p:style>
-        <p:txBody>
-          <a:bodyPr rtlCol="0" anchor="ctr"/>
-          <a:lstStyle/>
-          <a:p>
-            <a:pPr algn="ctr"/>
-            <a:endParaRPr lang="zh-TW" altLang="en-US"/>
-          </a:p>
-        </p:txBody>
-      </p:sp>
-      <p:sp>
-        <p:nvSpPr>
-          <p:cNvPr id="3" name="title"/>
-          <p:cNvSpPr txBox="1"/>
-          <p:nvPr/>
-        </p:nvSpPr>
-        <p:spPr>
-          <a:xfrm>
-            <a:off x="376574" y="318233"/>
-            <a:ext cx="1488802" cy="450957"/>
-          </a:xfrm>
-          <a:prstGeom prst="rect">
-            <a:avLst/>
-          </a:prstGeom>
-        </p:spPr>
-        <p:txBody>
-          <a:bodyPr wrap="square" lIns="0" tIns="0" rIns="0" bIns="0" rtlCol="0" anchor="t">
-            <a:spAutoFit/>
-          </a:bodyPr>
-          <a:lstStyle/>
-          <a:p>
-            <a:pPr>
-              <a:lnSpc>
-                <a:spcPts val="3667"/>
-              </a:lnSpc>
-            </a:pPr>
-            <a:r>
-              <a:rPr kumimoji="0" lang="en-US" altLang="zh-TW" sz="2800" b="1" i="0" u="none" strike="noStrike" cap="none" normalizeH="0" baseline="0" dirty="0">
-                <a:ln>
-                  <a:noFill/>
-                </a:ln>
-                <a:solidFill>
-                  <a:schemeClr val="bg1"/>
-                </a:solidFill>
-                <a:effectLst/>
-                <a:latin typeface="Aptos" panose="020B0004020202020204" pitchFamily="34" charset="0"/>
-                <a:ea typeface="新細明體" panose="02020500000000000000" pitchFamily="18" charset="-120"/>
-                <a:cs typeface="Times New Roman" panose="02020603050405020304" pitchFamily="18" charset="0"/>
-              </a:rPr>
-              <a:t>Polarity</a:t>
-            </a:r>
-            <a:endParaRPr lang="en-US" sz="2800" dirty="0">
-              <a:solidFill>
-                <a:schemeClr val="bg1"/>
-              </a:solidFill>
-              <a:latin typeface="+mj-lt"/>
-              <a:ea typeface="Raleway"/>
-              <a:cs typeface="Raleway"/>
-              <a:sym typeface="Raleway"/>
-            </a:endParaRPr>
-          </a:p>
-        </p:txBody>
-      </p:sp>
-      <p:graphicFrame>
-        <p:nvGraphicFramePr>
-          <p:cNvPr id="4" name="flow_chart_1">
-            <a:extLst>
-              <a:ext uri="{FF2B5EF4-FFF2-40B4-BE49-F238E27FC236}">
-                <a16:creationId xmlns:a16="http://schemas.microsoft.com/office/drawing/2014/main" id="{70D700A5-AAF9-36B1-3E2C-B79BC8ACC64B}"/>
-              </a:ext>
-            </a:extLst>
-          </p:cNvPr>
-          <p:cNvGraphicFramePr/>
-          <p:nvPr>
-            <p:extLst>
-              <p:ext uri="{D42A27DB-BD31-4B8C-83A1-F6EECF244321}">
-                <p14:modId xmlns:p14="http://schemas.microsoft.com/office/powerpoint/2010/main" val="2026336693"/>
-              </p:ext>
-            </p:extLst>
-          </p:nvPr>
-        </p:nvGraphicFramePr>
-        <p:xfrm>
-          <a:off x="2032000" y="719666"/>
-          <a:ext cx="8128000" cy="5418667"/>
-        </p:xfrm>
-        <a:graphic>
-          <a:graphicData uri="http://schemas.openxmlformats.org/drawingml/2006/diagram">
-            <dgm:relIds xmlns:dgm="http://schemas.openxmlformats.org/drawingml/2006/diagram" xmlns:r="http://schemas.openxmlformats.org/officeDocument/2006/relationships" r:dm="rId2" r:lo="rId3" r:qs="rId4" r:cs="rId5"/>
-          </a:graphicData>
-        </a:graphic>
-      </p:graphicFrame>
-    </p:spTree>
-    <p:extLst>
-      <p:ext uri="{BB962C8B-B14F-4D97-AF65-F5344CB8AC3E}">
-        <p14:creationId xmlns:p14="http://schemas.microsoft.com/office/powerpoint/2010/main" val="2659252449"/>
       </p:ext>
     </p:extLst>
   </p:cSld>
@@ -23316,7 +23520,7 @@
       </p:sp>
       <p:graphicFrame>
         <p:nvGraphicFramePr>
-          <p:cNvPr id="4" name="flow_chart_2">
+          <p:cNvPr id="4" name="flow_chart_1">
             <a:extLst>
               <a:ext uri="{FF2B5EF4-FFF2-40B4-BE49-F238E27FC236}">
                 <a16:creationId xmlns:a16="http://schemas.microsoft.com/office/drawing/2014/main" id="{70D700A5-AAF9-36B1-3E2C-B79BC8ACC64B}"/>
@@ -23327,7 +23531,7 @@
           <p:nvPr>
             <p:extLst>
               <p:ext uri="{D42A27DB-BD31-4B8C-83A1-F6EECF244321}">
-                <p14:modId xmlns:p14="http://schemas.microsoft.com/office/powerpoint/2010/main" val="3583614431"/>
+                <p14:modId xmlns:p14="http://schemas.microsoft.com/office/powerpoint/2010/main" val="2026336693"/>
               </p:ext>
             </p:extLst>
           </p:nvPr>
@@ -23345,7 +23549,7 @@
     </p:spTree>
     <p:extLst>
       <p:ext uri="{BB962C8B-B14F-4D97-AF65-F5344CB8AC3E}">
-        <p14:creationId xmlns:p14="http://schemas.microsoft.com/office/powerpoint/2010/main" val="4079346386"/>
+        <p14:creationId xmlns:p14="http://schemas.microsoft.com/office/powerpoint/2010/main" val="2659252449"/>
       </p:ext>
     </p:extLst>
   </p:cSld>
@@ -23490,6 +23694,180 @@
       </p:sp>
       <p:graphicFrame>
         <p:nvGraphicFramePr>
+          <p:cNvPr id="4" name="flow_chart_2">
+            <a:extLst>
+              <a:ext uri="{FF2B5EF4-FFF2-40B4-BE49-F238E27FC236}">
+                <a16:creationId xmlns:a16="http://schemas.microsoft.com/office/drawing/2014/main" id="{70D700A5-AAF9-36B1-3E2C-B79BC8ACC64B}"/>
+              </a:ext>
+            </a:extLst>
+          </p:cNvPr>
+          <p:cNvGraphicFramePr/>
+          <p:nvPr>
+            <p:extLst>
+              <p:ext uri="{D42A27DB-BD31-4B8C-83A1-F6EECF244321}">
+                <p14:modId xmlns:p14="http://schemas.microsoft.com/office/powerpoint/2010/main" val="3583614431"/>
+              </p:ext>
+            </p:extLst>
+          </p:nvPr>
+        </p:nvGraphicFramePr>
+        <p:xfrm>
+          <a:off x="2032000" y="719666"/>
+          <a:ext cx="8128000" cy="5418667"/>
+        </p:xfrm>
+        <a:graphic>
+          <a:graphicData uri="http://schemas.openxmlformats.org/drawingml/2006/diagram">
+            <dgm:relIds xmlns:dgm="http://schemas.openxmlformats.org/drawingml/2006/diagram" xmlns:r="http://schemas.openxmlformats.org/officeDocument/2006/relationships" r:dm="rId2" r:lo="rId3" r:qs="rId4" r:cs="rId5"/>
+          </a:graphicData>
+        </a:graphic>
+      </p:graphicFrame>
+    </p:spTree>
+    <p:extLst>
+      <p:ext uri="{BB962C8B-B14F-4D97-AF65-F5344CB8AC3E}">
+        <p14:creationId xmlns:p14="http://schemas.microsoft.com/office/powerpoint/2010/main" val="4079346386"/>
+      </p:ext>
+    </p:extLst>
+  </p:cSld>
+  <p:clrMapOvr>
+    <a:masterClrMapping/>
+  </p:clrMapOvr>
+  <mc:AlternateContent xmlns:mc="http://schemas.openxmlformats.org/markup-compatibility/2006" xmlns:p159="http://schemas.microsoft.com/office/powerpoint/2015/09/main">
+    <mc:Choice Requires="p159">
+      <p:transition spd="slow">
+        <p159:morph option="byObject"/>
+      </p:transition>
+    </mc:Choice>
+    <mc:Fallback xmlns="">
+      <p:transition spd="slow">
+        <p:fade/>
+      </p:transition>
+    </mc:Fallback>
+  </mc:AlternateContent>
+</p:sld>
+</file>
+
+<file path=ppt/slides/slide17.xml><?xml version="1.0" encoding="utf-8"?>
+<p:sld xmlns:a="http://schemas.openxmlformats.org/drawingml/2006/main" xmlns:r="http://schemas.openxmlformats.org/officeDocument/2006/relationships" xmlns:p="http://schemas.openxmlformats.org/presentationml/2006/main">
+  <p:cSld>
+    <p:spTree>
+      <p:nvGrpSpPr>
+        <p:cNvPr id="1" name=""/>
+        <p:cNvGrpSpPr/>
+        <p:nvPr/>
+      </p:nvGrpSpPr>
+      <p:grpSpPr>
+        <a:xfrm>
+          <a:off x="0" y="0"/>
+          <a:ext cx="0" cy="0"/>
+          <a:chOff x="0" y="0"/>
+          <a:chExt cx="0" cy="0"/>
+        </a:xfrm>
+      </p:grpSpPr>
+      <p:sp>
+        <p:nvSpPr>
+          <p:cNvPr id="2" name="矩形: 剪去同側角落 1">
+            <a:extLst>
+              <a:ext uri="{FF2B5EF4-FFF2-40B4-BE49-F238E27FC236}">
+                <a16:creationId xmlns:a16="http://schemas.microsoft.com/office/drawing/2014/main" id="{B75BE523-0625-07DE-3900-9DA5D3F70815}"/>
+              </a:ext>
+            </a:extLst>
+          </p:cNvPr>
+          <p:cNvSpPr>
+            <a:spLocks noGrp="1" noRot="1" noMove="1" noResize="1" noEditPoints="1" noAdjustHandles="1" noChangeArrowheads="1" noChangeShapeType="1"/>
+          </p:cNvSpPr>
+          <p:nvPr/>
+        </p:nvSpPr>
+        <p:spPr>
+          <a:xfrm rot="5400000">
+            <a:off x="667512" y="-439268"/>
+            <a:ext cx="630936" cy="1965960"/>
+          </a:xfrm>
+          <a:prstGeom prst="snip2SameRect">
+            <a:avLst/>
+          </a:prstGeom>
+          <a:ln>
+            <a:noFill/>
+          </a:ln>
+        </p:spPr>
+        <p:style>
+          <a:lnRef idx="2">
+            <a:schemeClr val="accent1">
+              <a:shade val="15000"/>
+            </a:schemeClr>
+          </a:lnRef>
+          <a:fillRef idx="1">
+            <a:schemeClr val="accent1"/>
+          </a:fillRef>
+          <a:effectRef idx="0">
+            <a:schemeClr val="accent1"/>
+          </a:effectRef>
+          <a:fontRef idx="minor">
+            <a:schemeClr val="lt1"/>
+          </a:fontRef>
+        </p:style>
+        <p:txBody>
+          <a:bodyPr rtlCol="0" anchor="ctr"/>
+          <a:lstStyle/>
+          <a:p>
+            <a:pPr algn="ctr"/>
+            <a:endParaRPr lang="zh-TW" altLang="en-US"/>
+          </a:p>
+        </p:txBody>
+      </p:sp>
+      <p:sp>
+        <p:nvSpPr>
+          <p:cNvPr id="3" name="title"/>
+          <p:cNvSpPr txBox="1"/>
+          <p:nvPr/>
+        </p:nvSpPr>
+        <p:spPr>
+          <a:xfrm>
+            <a:off x="376574" y="318233"/>
+            <a:ext cx="1488802" cy="450957"/>
+          </a:xfrm>
+          <a:prstGeom prst="rect">
+            <a:avLst/>
+          </a:prstGeom>
+        </p:spPr>
+        <p:txBody>
+          <a:bodyPr wrap="square" lIns="0" tIns="0" rIns="0" bIns="0" rtlCol="0" anchor="t">
+            <a:spAutoFit/>
+          </a:bodyPr>
+          <a:lstStyle/>
+          <a:p>
+            <a:pPr>
+              <a:lnSpc>
+                <a:spcPts val="3667"/>
+              </a:lnSpc>
+            </a:pPr>
+            <a:r>
+              <a:rPr kumimoji="0" lang="en-US" altLang="zh-TW" sz="2800" b="1" i="0" u="none" strike="noStrike" cap="none" normalizeH="0" baseline="0" dirty="0">
+                <a:ln>
+                  <a:noFill/>
+                </a:ln>
+                <a:solidFill>
+                  <a:schemeClr val="bg1"/>
+                </a:solidFill>
+                <a:effectLst/>
+                <a:latin typeface="Aptos" panose="020B0004020202020204" pitchFamily="34" charset="0"/>
+                <a:ea typeface="新細明體" panose="02020500000000000000" pitchFamily="18" charset="-120"/>
+                <a:cs typeface="Times New Roman" panose="02020603050405020304" pitchFamily="18" charset="0"/>
+              </a:rPr>
+              <a:t>Polarity</a:t>
+            </a:r>
+            <a:endParaRPr lang="en-US" sz="2800" dirty="0">
+              <a:solidFill>
+                <a:schemeClr val="bg1"/>
+              </a:solidFill>
+              <a:latin typeface="+mj-lt"/>
+              <a:ea typeface="Raleway"/>
+              <a:cs typeface="Raleway"/>
+              <a:sym typeface="Raleway"/>
+            </a:endParaRPr>
+          </a:p>
+        </p:txBody>
+      </p:sp>
+      <p:graphicFrame>
+        <p:nvGraphicFramePr>
           <p:cNvPr id="4" name="flow_chart_3">
             <a:extLst>
               <a:ext uri="{FF2B5EF4-FFF2-40B4-BE49-F238E27FC236}">
@@ -23541,7 +23919,7 @@
 </p:sld>
 </file>
 
-<file path=ppt/slides/slide17.xml><?xml version="1.0" encoding="utf-8"?>
+<file path=ppt/slides/slide18.xml><?xml version="1.0" encoding="utf-8"?>
 <p:sld xmlns:a="http://schemas.openxmlformats.org/drawingml/2006/main" xmlns:r="http://schemas.openxmlformats.org/officeDocument/2006/relationships" xmlns:p="http://schemas.openxmlformats.org/presentationml/2006/main">
   <p:cSld>
     <p:spTree>
@@ -23773,7 +24151,7 @@
             <a:fld id="{5B0A2E34-17E6-46B6-A0CD-23734D57E7FF}" type="slidenum">
               <a:rPr lang="zh-TW" altLang="en-US" smtClean="0"/>
               <a:pPr algn="ctr"/>
-              <a:t>17</a:t>
+              <a:t>18</a:t>
             </a:fld>
             <a:endParaRPr lang="zh-TW" altLang="en-US"/>
           </a:p>
@@ -24699,13 +25077,15 @@
       <p:sp>
         <p:nvSpPr>
           <p:cNvPr id="3" name="content_1"/>
-          <p:cNvSpPr txBox="1"/>
+          <p:cNvSpPr txBox="1">
+            <a:spLocks noGrp="1" noRot="1" noMove="1" noResize="1" noEditPoints="1" noAdjustHandles="1" noChangeArrowheads="1" noChangeShapeType="1"/>
+          </p:cNvSpPr>
           <p:nvPr/>
         </p:nvSpPr>
         <p:spPr>
           <a:xfrm>
-            <a:off x="550332" y="2768762"/>
-            <a:ext cx="2853771" cy="1938992"/>
+            <a:off x="6096000" y="4817495"/>
+            <a:ext cx="5269867" cy="1107996"/>
           </a:xfrm>
           <a:prstGeom prst="rect">
             <a:avLst/>
@@ -24752,37 +25132,6 @@
               <a:rPr lang="en-US" altLang="zh-TW" sz="1800" dirty="0"/>
               <a:t>Protects components</a:t>
             </a:r>
-          </a:p>
-          <a:p>
-            <a:pPr>
-              <a:buFont typeface="Arial" panose="020B0604020202020204" pitchFamily="34" charset="0"/>
-              <a:buChar char="•"/>
-            </a:pPr>
-            <a:endParaRPr lang="en-US" altLang="zh-TW" sz="1800" dirty="0"/>
-          </a:p>
-          <a:p>
-            <a:r>
-              <a:rPr lang="en-US" altLang="zh-TW" sz="1800" dirty="0">
-                <a:solidFill>
-                  <a:schemeClr val="accent1">
-                    <a:lumMod val="60000"/>
-                    <a:lumOff val="40000"/>
-                  </a:schemeClr>
-                </a:solidFill>
-              </a:rPr>
-              <a:t>*Without a resistor, many components would </a:t>
-            </a:r>
-            <a:r>
-              <a:rPr lang="en-US" altLang="zh-TW" sz="1800" b="1" dirty="0">
-                <a:solidFill>
-                  <a:schemeClr val="accent1">
-                    <a:lumMod val="60000"/>
-                    <a:lumOff val="40000"/>
-                  </a:schemeClr>
-                </a:solidFill>
-              </a:rPr>
-              <a:t>burn</a:t>
-            </a:r>
             <a:r>
               <a:rPr lang="en-US" altLang="zh-TW" sz="1800" dirty="0">
                 <a:solidFill>
@@ -24800,13 +25149,15 @@
       <p:sp>
         <p:nvSpPr>
           <p:cNvPr id="4" name="item_1"/>
-          <p:cNvSpPr txBox="1"/>
+          <p:cNvSpPr txBox="1">
+            <a:spLocks noGrp="1" noRot="1" noMove="1" noResize="1" noEditPoints="1" noAdjustHandles="1" noChangeArrowheads="1" noChangeShapeType="1"/>
+          </p:cNvSpPr>
           <p:nvPr/>
         </p:nvSpPr>
         <p:spPr>
           <a:xfrm>
-            <a:off x="550333" y="1978087"/>
-            <a:ext cx="2673350" cy="272447"/>
+            <a:off x="6096000" y="4462617"/>
+            <a:ext cx="2673350" cy="294953"/>
           </a:xfrm>
           <a:prstGeom prst="rect">
             <a:avLst/>
@@ -24827,9 +25178,9 @@
               </a:spcBef>
             </a:pPr>
             <a:r>
-              <a:rPr lang="en-US" sz="1800" spc="-49" dirty="0">
-                <a:solidFill>
-                  <a:schemeClr val="accent2"/>
+              <a:rPr lang="en-US" sz="2000" b="1" spc="-49" dirty="0">
+                <a:solidFill>
+                  <a:srgbClr val="0057CC"/>
                 </a:solidFill>
                 <a:ea typeface="ITC Avant Garde Gothic"/>
                 <a:cs typeface="ITC Avant Garde Gothic"/>
@@ -24843,12 +25194,14 @@
       <p:sp>
         <p:nvSpPr>
           <p:cNvPr id="7" name="item_2"/>
-          <p:cNvSpPr txBox="1"/>
+          <p:cNvSpPr txBox="1">
+            <a:spLocks noGrp="1" noRot="1" noMove="1" noResize="1" noEditPoints="1" noAdjustHandles="1" noChangeArrowheads="1" noChangeShapeType="1"/>
+          </p:cNvSpPr>
           <p:nvPr/>
         </p:nvSpPr>
         <p:spPr>
           <a:xfrm>
-            <a:off x="4462403" y="1982519"/>
+            <a:off x="6096000" y="2672382"/>
             <a:ext cx="3450325" cy="294953"/>
           </a:xfrm>
           <a:prstGeom prst="rect">
@@ -24870,9 +25223,9 @@
               </a:spcBef>
             </a:pPr>
             <a:r>
-              <a:rPr lang="en-US" sz="2000" spc="-49" dirty="0">
-                <a:solidFill>
-                  <a:srgbClr val="00B050"/>
+              <a:rPr lang="en-US" sz="2000" b="1" spc="-49" dirty="0">
+                <a:solidFill>
+                  <a:srgbClr val="0057CC"/>
                 </a:solidFill>
                 <a:ea typeface="ITC Avant Garde Gothic"/>
                 <a:cs typeface="ITC Avant Garde Gothic"/>
@@ -24886,13 +25239,15 @@
       <p:sp>
         <p:nvSpPr>
           <p:cNvPr id="9" name="content_3"/>
-          <p:cNvSpPr txBox="1"/>
+          <p:cNvSpPr txBox="1">
+            <a:spLocks noGrp="1" noRot="1" noMove="1" noResize="1" noEditPoints="1" noAdjustHandles="1" noChangeArrowheads="1" noChangeShapeType="1"/>
+          </p:cNvSpPr>
           <p:nvPr/>
         </p:nvSpPr>
         <p:spPr>
           <a:xfrm>
-            <a:off x="8086713" y="2692562"/>
-            <a:ext cx="2965321" cy="1938992"/>
+            <a:off x="6096000" y="932509"/>
+            <a:ext cx="5153799" cy="1384995"/>
           </a:xfrm>
           <a:prstGeom prst="rect">
             <a:avLst/>
@@ -24925,14 +25280,10 @@
               <a:buFont typeface="Arial" panose="020B0604020202020204" pitchFamily="34" charset="0"/>
               <a:buChar char="•"/>
             </a:pPr>
-            <a:endParaRPr lang="en-US" altLang="zh-TW" sz="1800" dirty="0"/>
-          </a:p>
-          <a:p>
-            <a:r>
-              <a:rPr lang="en-US" altLang="zh-TW" sz="1800" b="1" dirty="0"/>
-              <a:t>Important rules:</a:t>
-            </a:r>
-            <a:endParaRPr lang="en-US" altLang="zh-TW" sz="1800" dirty="0"/>
+            <a:r>
+              <a:rPr lang="en-US" altLang="zh-TW" sz="1800" dirty="0"/>
+              <a:t>Smooths voltage</a:t>
+            </a:r>
           </a:p>
           <a:p>
             <a:pPr>
@@ -24941,7 +25292,7 @@
             </a:pPr>
             <a:r>
               <a:rPr lang="en-US" altLang="zh-TW" sz="1800" dirty="0"/>
-              <a:t>Has polarity (+ and −)</a:t>
+              <a:t>Blocks DC, passes AC (for now: “filters noise”)</a:t>
             </a:r>
           </a:p>
           <a:p>
@@ -24949,14 +25300,6 @@
               <a:buFont typeface="Arial" panose="020B0604020202020204" pitchFamily="34" charset="0"/>
               <a:buChar char="•"/>
             </a:pPr>
-            <a:r>
-              <a:rPr lang="en-US" altLang="zh-TW" sz="1800" dirty="0"/>
-              <a:t>Always needs a </a:t>
-            </a:r>
-            <a:r>
-              <a:rPr lang="en-US" altLang="zh-TW" sz="1800" b="1" dirty="0"/>
-              <a:t>resistor</a:t>
-            </a:r>
             <a:endParaRPr lang="en-US" altLang="zh-TW" sz="1800" dirty="0"/>
           </a:p>
         </p:txBody>
@@ -24964,13 +25307,15 @@
       <p:sp>
         <p:nvSpPr>
           <p:cNvPr id="10" name="item_3"/>
-          <p:cNvSpPr txBox="1"/>
+          <p:cNvSpPr txBox="1">
+            <a:spLocks noGrp="1" noRot="1" noMove="1" noResize="1" noEditPoints="1" noAdjustHandles="1" noChangeArrowheads="1" noChangeShapeType="1"/>
+          </p:cNvSpPr>
           <p:nvPr/>
         </p:nvSpPr>
         <p:spPr>
           <a:xfrm>
-            <a:off x="8150087" y="1978087"/>
-            <a:ext cx="3518942" cy="272447"/>
+            <a:off x="6096000" y="577631"/>
+            <a:ext cx="3518942" cy="294953"/>
           </a:xfrm>
           <a:prstGeom prst="rect">
             <a:avLst/>
@@ -24991,32 +25336,10 @@
               </a:spcBef>
             </a:pPr>
             <a:r>
-              <a:rPr lang="en-US" sz="1800" spc="-49" dirty="0">
-                <a:gradFill>
-                  <a:gsLst>
-                    <a:gs pos="0">
-                      <a:srgbClr val="FF0000"/>
-                    </a:gs>
-                    <a:gs pos="20000">
-                      <a:schemeClr val="accent2"/>
-                    </a:gs>
-                    <a:gs pos="39000">
-                      <a:srgbClr val="FFBE00"/>
-                    </a:gs>
-                    <a:gs pos="100000">
-                      <a:srgbClr val="7030A0"/>
-                    </a:gs>
-                    <a:gs pos="79000">
-                      <a:schemeClr val="accent1"/>
-                    </a:gs>
-                    <a:gs pos="59000">
-                      <a:schemeClr val="accent4">
-                        <a:lumMod val="50000"/>
-                      </a:schemeClr>
-                    </a:gs>
-                  </a:gsLst>
-                  <a:lin ang="2700000" scaled="0"/>
-                </a:gradFill>
+              <a:rPr lang="en-US" sz="2000" b="1" spc="-49" dirty="0">
+                <a:solidFill>
+                  <a:srgbClr val="0057CC"/>
+                </a:solidFill>
                 <a:ea typeface="ITC Avant Garde Gothic"/>
                 <a:cs typeface="ITC Avant Garde Gothic"/>
                 <a:sym typeface="ITC Avant Garde Gothic"/>
@@ -25029,20 +25352,22 @@
       <p:sp>
         <p:nvSpPr>
           <p:cNvPr id="12" name="title"/>
-          <p:cNvSpPr txBox="1"/>
+          <p:cNvSpPr txBox="1">
+            <a:spLocks noGrp="1" noRot="1" noMove="1" noResize="1" noEditPoints="1" noAdjustHandles="1" noChangeArrowheads="1" noChangeShapeType="1"/>
+          </p:cNvSpPr>
           <p:nvPr/>
         </p:nvSpPr>
         <p:spPr>
           <a:xfrm>
             <a:off x="550333" y="439737"/>
-            <a:ext cx="7467600" cy="612155"/>
+            <a:ext cx="5082371" cy="1290097"/>
           </a:xfrm>
           <a:prstGeom prst="rect">
             <a:avLst/>
           </a:prstGeom>
         </p:spPr>
         <p:txBody>
-          <a:bodyPr lIns="0" tIns="0" rIns="0" bIns="0" rtlCol="0" anchor="t">
+          <a:bodyPr wrap="square" lIns="0" tIns="0" rIns="0" bIns="0" rtlCol="0" anchor="t">
             <a:spAutoFit/>
           </a:bodyPr>
           <a:lstStyle/>
@@ -25056,14 +25381,32 @@
               </a:spcBef>
             </a:pPr>
             <a:r>
-              <a:rPr lang="en-US" altLang="zh-TW" sz="3600" b="1" dirty="0">
+              <a:rPr lang="en-US" altLang="zh-TW" sz="3200" b="1" dirty="0">
                 <a:solidFill>
                   <a:srgbClr val="0070C0"/>
                 </a:solidFill>
               </a:rPr>
-              <a:t>The 3 most common components</a:t>
-            </a:r>
-            <a:endParaRPr lang="en-US" sz="3600" b="1" spc="-160" dirty="0">
+              <a:t>The 3 most </a:t>
+            </a:r>
+          </a:p>
+          <a:p>
+            <a:pPr>
+              <a:lnSpc>
+                <a:spcPts val="5334"/>
+              </a:lnSpc>
+              <a:spcBef>
+                <a:spcPct val="0"/>
+              </a:spcBef>
+            </a:pPr>
+            <a:r>
+              <a:rPr lang="en-US" altLang="zh-TW" sz="3200" b="1" dirty="0">
+                <a:solidFill>
+                  <a:srgbClr val="0070C0"/>
+                </a:solidFill>
+              </a:rPr>
+              <a:t>common components</a:t>
+            </a:r>
+            <a:endParaRPr lang="en-US" sz="3200" b="1" spc="-160" dirty="0">
               <a:solidFill>
                 <a:srgbClr val="0070C0"/>
               </a:solidFill>
@@ -25074,44 +25417,6 @@
           </a:p>
         </p:txBody>
       </p:sp>
-      <p:cxnSp>
-        <p:nvCxnSpPr>
-          <p:cNvPr id="14" name="Straight Connector 13">
-            <a:extLst>
-              <a:ext uri="{FF2B5EF4-FFF2-40B4-BE49-F238E27FC236}">
-                <a16:creationId xmlns:a16="http://schemas.microsoft.com/office/drawing/2014/main" id="{AEC89CC0-60C4-0CF7-9091-8064CC65DC88}"/>
-              </a:ext>
-            </a:extLst>
-          </p:cNvPr>
-          <p:cNvCxnSpPr>
-            <a:cxnSpLocks/>
-          </p:cNvCxnSpPr>
-          <p:nvPr/>
-        </p:nvCxnSpPr>
-        <p:spPr>
-          <a:xfrm flipV="1">
-            <a:off x="0" y="2392230"/>
-            <a:ext cx="12197554" cy="10583"/>
-          </a:xfrm>
-          <a:prstGeom prst="line">
-            <a:avLst/>
-          </a:prstGeom>
-        </p:spPr>
-        <p:style>
-          <a:lnRef idx="1">
-            <a:schemeClr val="accent1"/>
-          </a:lnRef>
-          <a:fillRef idx="0">
-            <a:schemeClr val="accent1"/>
-          </a:fillRef>
-          <a:effectRef idx="0">
-            <a:schemeClr val="accent1"/>
-          </a:effectRef>
-          <a:fontRef idx="minor">
-            <a:schemeClr val="tx1"/>
-          </a:fontRef>
-        </p:style>
-      </p:cxnSp>
       <p:sp>
         <p:nvSpPr>
           <p:cNvPr id="23" name="content_2">
@@ -25121,13 +25426,15 @@
               </a:ext>
             </a:extLst>
           </p:cNvPr>
-          <p:cNvSpPr txBox="1"/>
+          <p:cNvSpPr txBox="1">
+            <a:spLocks noGrp="1" noRot="1" noMove="1" noResize="1" noEditPoints="1" noAdjustHandles="1" noChangeArrowheads="1" noChangeShapeType="1"/>
+          </p:cNvSpPr>
           <p:nvPr/>
         </p:nvSpPr>
         <p:spPr>
           <a:xfrm>
-            <a:off x="4196779" y="2667221"/>
-            <a:ext cx="2965321" cy="2585323"/>
+            <a:off x="6096000" y="2967335"/>
+            <a:ext cx="5541581" cy="1200329"/>
           </a:xfrm>
           <a:prstGeom prst="rect">
             <a:avLst/>
@@ -25176,34 +25483,14 @@
               <a:t>Blocks DC, passes AC (for now: “filters noise”)</a:t>
             </a:r>
           </a:p>
-          <a:p>
-            <a:pPr>
-              <a:buFont typeface="Arial" panose="020B0604020202020204" pitchFamily="34" charset="0"/>
-              <a:buChar char="•"/>
-            </a:pPr>
-            <a:endParaRPr lang="en-US" altLang="zh-TW" sz="1800" dirty="0"/>
-          </a:p>
-          <a:p>
-            <a:r>
-              <a:rPr lang="en-US" altLang="zh-TW" sz="1800" dirty="0">
-                <a:solidFill>
-                  <a:schemeClr val="accent1">
-                    <a:lumMod val="60000"/>
-                    <a:lumOff val="40000"/>
-                  </a:schemeClr>
-                </a:solidFill>
-              </a:rPr>
-              <a:t>*A shock absorber for voltage</a:t>
-            </a:r>
-          </a:p>
         </p:txBody>
       </p:sp>
       <p:pic>
         <p:nvPicPr>
-          <p:cNvPr id="13" name="img_1" descr="一張含有 電路, 電子工程, 電子元件, 電子產品 的圖片&#10;&#10;AI 產生的內容可能不正確。">
+          <p:cNvPr id="5" name="img_1" descr="一張含有 天空, 雲, 天際線, 大都會區 的圖片&#10;&#10;AI 產生的內容可能不正確。">
             <a:extLst>
               <a:ext uri="{FF2B5EF4-FFF2-40B4-BE49-F238E27FC236}">
-                <a16:creationId xmlns:a16="http://schemas.microsoft.com/office/drawing/2014/main" id="{03D44CE2-5B8B-7A85-3909-B3454DD152E2}"/>
+                <a16:creationId xmlns:a16="http://schemas.microsoft.com/office/drawing/2014/main" id="{BA3D3161-9C4E-EF89-A702-6CCCF1E1D4F3}"/>
               </a:ext>
             </a:extLst>
           </p:cNvPr>
@@ -25213,139 +25500,20 @@
           <p:nvPr/>
         </p:nvPicPr>
         <p:blipFill>
-          <a:blip r:embed="rId2" cstate="print">
+          <a:blip r:embed="rId2">
             <a:extLst>
-              <a:ext uri="{BEBA8EAE-BF5A-486C-A8C5-ECC9F3942E4B}">
-                <a14:imgProps xmlns:a14="http://schemas.microsoft.com/office/drawing/2010/main">
-                  <a14:imgLayer r:embed="rId3">
-                    <a14:imgEffect>
-                      <a14:backgroundRemoval t="18515" b="90900" l="7000" r="63846">
-                        <a14:foregroundMark x1="63846" y1="49163" x2="63846" y2="49163"/>
-                      </a14:backgroundRemoval>
-                    </a14:imgEffect>
-                  </a14:imgLayer>
-                </a14:imgProps>
-              </a:ext>
               <a:ext uri="{28A0092B-C50C-407E-A947-70E740481C1C}">
                 <a14:useLocalDpi xmlns:a14="http://schemas.microsoft.com/office/drawing/2010/main" val="0"/>
               </a:ext>
             </a:extLst>
           </a:blip>
-          <a:srcRect l="12196" t="16041" r="29284" b="17807"/>
+          <a:srcRect l="19326" r="21184"/>
           <a:stretch/>
         </p:blipFill>
         <p:spPr>
           <a:xfrm>
-            <a:off x="1230119" y="1568247"/>
-            <a:ext cx="1313777" cy="1092125"/>
-          </a:xfrm>
-          <a:prstGeom prst="rect">
-            <a:avLst/>
-          </a:prstGeom>
-        </p:spPr>
-      </p:pic>
-      <p:pic>
-        <p:nvPicPr>
-          <p:cNvPr id="17" name="img_2" descr="一張含有 電子產品, 電路, 電子工程, 電子元件 的圖片&#10;&#10;AI 產生的內容可能不正確。">
-            <a:extLst>
-              <a:ext uri="{FF2B5EF4-FFF2-40B4-BE49-F238E27FC236}">
-                <a16:creationId xmlns:a16="http://schemas.microsoft.com/office/drawing/2014/main" id="{C53E8262-2A18-FCE6-DE9B-D80B39064720}"/>
-              </a:ext>
-            </a:extLst>
-          </p:cNvPr>
-          <p:cNvPicPr>
-            <a:picLocks noChangeAspect="1"/>
-          </p:cNvPicPr>
-          <p:nvPr/>
-        </p:nvPicPr>
-        <p:blipFill>
-          <a:blip r:embed="rId4" cstate="print">
-            <a:extLst>
-              <a:ext uri="{BEBA8EAE-BF5A-486C-A8C5-ECC9F3942E4B}">
-                <a14:imgProps xmlns:a14="http://schemas.microsoft.com/office/drawing/2010/main">
-                  <a14:imgLayer r:embed="rId5">
-                    <a14:imgEffect>
-                      <a14:backgroundRemoval t="10000" b="90000" l="10000" r="90000">
-                        <a14:backgroundMark x1="16406" y1="22880" x2="59375" y2="15074"/>
-                        <a14:backgroundMark x1="59375" y1="15074" x2="81641" y2="19381"/>
-                        <a14:backgroundMark x1="46289" y1="21803" x2="63672" y2="19381"/>
-                        <a14:backgroundMark x1="63672" y1="19381" x2="74121" y2="20188"/>
-                        <a14:backgroundMark x1="40234" y1="21400" x2="54980" y2="36878"/>
-                        <a14:backgroundMark x1="25977" y1="51279" x2="44238" y2="49664"/>
-                        <a14:backgroundMark x1="61426" y1="53297" x2="69238" y2="52086"/>
-                      </a14:backgroundRemoval>
-                    </a14:imgEffect>
-                  </a14:imgLayer>
-                </a14:imgProps>
-              </a:ext>
-              <a:ext uri="{28A0092B-C50C-407E-A947-70E740481C1C}">
-                <a14:useLocalDpi xmlns:a14="http://schemas.microsoft.com/office/drawing/2010/main" val="0"/>
-              </a:ext>
-            </a:extLst>
-          </a:blip>
-          <a:srcRect l="48633" t="21880" r="9274" b="52024"/>
-          <a:stretch/>
-        </p:blipFill>
-        <p:spPr>
-          <a:xfrm>
-            <a:off x="5748949" y="1811824"/>
-            <a:ext cx="1313777" cy="590989"/>
-          </a:xfrm>
-          <a:prstGeom prst="rect">
-            <a:avLst/>
-          </a:prstGeom>
-        </p:spPr>
-      </p:pic>
-      <p:pic>
-        <p:nvPicPr>
-          <p:cNvPr id="19" name="img_3" descr="一張含有 電子工程, 電路元件, 被動元件, 二極體 的圖片&#10;&#10;AI 產生的內容可能不正確。">
-            <a:extLst>
-              <a:ext uri="{FF2B5EF4-FFF2-40B4-BE49-F238E27FC236}">
-                <a16:creationId xmlns:a16="http://schemas.microsoft.com/office/drawing/2014/main" id="{DCF0867B-A194-2C68-0D50-449444AD4692}"/>
-              </a:ext>
-            </a:extLst>
-          </p:cNvPr>
-          <p:cNvPicPr>
-            <a:picLocks noChangeAspect="1"/>
-          </p:cNvPicPr>
-          <p:nvPr/>
-        </p:nvPicPr>
-        <p:blipFill>
-          <a:blip r:embed="rId6">
-            <a:extLst>
-              <a:ext uri="{BEBA8EAE-BF5A-486C-A8C5-ECC9F3942E4B}">
-                <a14:imgProps xmlns:a14="http://schemas.microsoft.com/office/drawing/2010/main">
-                  <a14:imgLayer r:embed="rId7">
-                    <a14:imgEffect>
-                      <a14:backgroundRemoval t="10000" b="90000" l="10000" r="90000">
-                        <a14:foregroundMark x1="51416" y1="81219" x2="53376" y2="80934"/>
-                        <a14:foregroundMark x1="45359" y1="76654" x2="48523" y2="78599"/>
-                        <a14:backgroundMark x1="25527" y1="43191" x2="28692" y2="76265"/>
-                        <a14:backgroundMark x1="28692" y1="76265" x2="31224" y2="84825"/>
-                        <a14:backgroundMark x1="52110" y1="34630" x2="87342" y2="26070"/>
-                        <a14:backgroundMark x1="33122" y1="81323" x2="38608" y2="89883"/>
-                        <a14:backgroundMark x1="52110" y1="92607" x2="56962" y2="90272"/>
-                        <a14:backgroundMark x1="41561" y1="87549" x2="54852" y2="86381"/>
-                        <a14:backgroundMark x1="41139" y1="84825" x2="42616" y2="85603"/>
-                        <a14:backgroundMark x1="41561" y1="85603" x2="39451" y2="84825"/>
-                        <a14:backgroundMark x1="40717" y1="84825" x2="41983" y2="86770"/>
-                      </a14:backgroundRemoval>
-                    </a14:imgEffect>
-                  </a14:imgLayer>
-                </a14:imgProps>
-              </a:ext>
-              <a:ext uri="{28A0092B-C50C-407E-A947-70E740481C1C}">
-                <a14:useLocalDpi xmlns:a14="http://schemas.microsoft.com/office/drawing/2010/main" val="0"/>
-              </a:ext>
-            </a:extLst>
-          </a:blip>
-          <a:srcRect l="34159" t="25992" r="33945" b="464"/>
-          <a:stretch/>
-        </p:blipFill>
-        <p:spPr>
-          <a:xfrm>
-            <a:off x="10733194" y="1714766"/>
-            <a:ext cx="637679" cy="797192"/>
+            <a:off x="550333" y="2614145"/>
+            <a:ext cx="4605218" cy="3311345"/>
           </a:xfrm>
           <a:prstGeom prst="rect">
             <a:avLst/>
@@ -25403,7 +25571,9 @@
               </a:ext>
             </a:extLst>
           </p:cNvPr>
-          <p:cNvSpPr/>
+          <p:cNvSpPr>
+            <a:spLocks noGrp="1" noRot="1" noMove="1" noResize="1" noEditPoints="1" noAdjustHandles="1" noChangeArrowheads="1" noChangeShapeType="1"/>
+          </p:cNvSpPr>
           <p:nvPr/>
         </p:nvSpPr>
         <p:spPr>
@@ -25455,7 +25625,9 @@
               </a:ext>
             </a:extLst>
           </p:cNvPr>
-          <p:cNvSpPr/>
+          <p:cNvSpPr>
+            <a:spLocks noGrp="1" noRot="1" noMove="1" noResize="1" noEditPoints="1" noAdjustHandles="1" noChangeArrowheads="1" noChangeShapeType="1"/>
+          </p:cNvSpPr>
           <p:nvPr/>
         </p:nvSpPr>
         <p:spPr>
@@ -25507,7 +25679,9 @@
               </a:ext>
             </a:extLst>
           </p:cNvPr>
-          <p:cNvSpPr/>
+          <p:cNvSpPr>
+            <a:spLocks noGrp="1" noRot="1" noMove="1" noResize="1" noEditPoints="1" noAdjustHandles="1" noChangeArrowheads="1" noChangeShapeType="1"/>
+          </p:cNvSpPr>
           <p:nvPr/>
         </p:nvSpPr>
         <p:spPr>
@@ -25553,7 +25727,9 @@
       <p:sp>
         <p:nvSpPr>
           <p:cNvPr id="3" name="content_1"/>
-          <p:cNvSpPr txBox="1"/>
+          <p:cNvSpPr txBox="1">
+            <a:spLocks noGrp="1" noRot="1" noMove="1" noResize="1" noEditPoints="1" noAdjustHandles="1" noChangeArrowheads="1" noChangeShapeType="1"/>
+          </p:cNvSpPr>
           <p:nvPr/>
         </p:nvSpPr>
         <p:spPr>
@@ -25740,7 +25916,9 @@
       <p:sp>
         <p:nvSpPr>
           <p:cNvPr id="9" name="content_3"/>
-          <p:cNvSpPr txBox="1"/>
+          <p:cNvSpPr txBox="1">
+            <a:spLocks noGrp="1" noRot="1" noMove="1" noResize="1" noEditPoints="1" noAdjustHandles="1" noChangeArrowheads="1" noChangeShapeType="1"/>
+          </p:cNvSpPr>
           <p:nvPr/>
         </p:nvSpPr>
         <p:spPr>
@@ -25915,7 +26093,9 @@
               </a:ext>
             </a:extLst>
           </p:cNvPr>
-          <p:cNvSpPr txBox="1"/>
+          <p:cNvSpPr txBox="1">
+            <a:spLocks noGrp="1" noRot="1" noMove="1" noResize="1" noEditPoints="1" noAdjustHandles="1" noChangeArrowheads="1" noChangeShapeType="1"/>
+          </p:cNvSpPr>
           <p:nvPr/>
         </p:nvSpPr>
         <p:spPr>
@@ -26018,6 +26198,564 @@
 </file>
 
 <file path=ppt/slides/slide6.xml><?xml version="1.0" encoding="utf-8"?>
+<p:sld xmlns:a="http://schemas.openxmlformats.org/drawingml/2006/main" xmlns:r="http://schemas.openxmlformats.org/officeDocument/2006/relationships" xmlns:p="http://schemas.openxmlformats.org/presentationml/2006/main">
+  <p:cSld>
+    <p:spTree>
+      <p:nvGrpSpPr>
+        <p:cNvPr id="1" name=""/>
+        <p:cNvGrpSpPr/>
+        <p:nvPr/>
+      </p:nvGrpSpPr>
+      <p:grpSpPr>
+        <a:xfrm>
+          <a:off x="0" y="0"/>
+          <a:ext cx="0" cy="0"/>
+          <a:chOff x="0" y="0"/>
+          <a:chExt cx="0" cy="0"/>
+        </a:xfrm>
+      </p:grpSpPr>
+      <p:sp>
+        <p:nvSpPr>
+          <p:cNvPr id="3" name="content_1"/>
+          <p:cNvSpPr txBox="1">
+            <a:spLocks noGrp="1" noRot="1" noMove="1" noResize="1" noEditPoints="1" noAdjustHandles="1" noChangeArrowheads="1" noChangeShapeType="1"/>
+          </p:cNvSpPr>
+          <p:nvPr/>
+        </p:nvSpPr>
+        <p:spPr>
+          <a:xfrm>
+            <a:off x="550332" y="2768762"/>
+            <a:ext cx="2853771" cy="1938992"/>
+          </a:xfrm>
+          <a:prstGeom prst="rect">
+            <a:avLst/>
+          </a:prstGeom>
+        </p:spPr>
+        <p:txBody>
+          <a:bodyPr wrap="square" lIns="0" tIns="0" rIns="0" bIns="0" rtlCol="0" anchor="t">
+            <a:spAutoFit/>
+          </a:bodyPr>
+          <a:lstStyle/>
+          <a:p>
+            <a:r>
+              <a:rPr lang="en-US" altLang="zh-TW" sz="1800" b="1" dirty="0"/>
+              <a:t>What it does:</a:t>
+            </a:r>
+            <a:endParaRPr lang="en-US" altLang="zh-TW" sz="1800" dirty="0"/>
+          </a:p>
+          <a:p>
+            <a:pPr>
+              <a:buFont typeface="Arial" panose="020B0604020202020204" pitchFamily="34" charset="0"/>
+              <a:buChar char="•"/>
+            </a:pPr>
+            <a:r>
+              <a:rPr lang="en-US" altLang="zh-TW" sz="1800" dirty="0"/>
+              <a:t>Limits current</a:t>
+            </a:r>
+          </a:p>
+          <a:p>
+            <a:pPr>
+              <a:buFont typeface="Arial" panose="020B0604020202020204" pitchFamily="34" charset="0"/>
+              <a:buChar char="•"/>
+            </a:pPr>
+            <a:r>
+              <a:rPr lang="en-US" altLang="zh-TW" sz="1800" dirty="0"/>
+              <a:t>Drops voltage</a:t>
+            </a:r>
+          </a:p>
+          <a:p>
+            <a:pPr>
+              <a:buFont typeface="Arial" panose="020B0604020202020204" pitchFamily="34" charset="0"/>
+              <a:buChar char="•"/>
+            </a:pPr>
+            <a:r>
+              <a:rPr lang="en-US" altLang="zh-TW" sz="1800" dirty="0"/>
+              <a:t>Protects components</a:t>
+            </a:r>
+          </a:p>
+          <a:p>
+            <a:pPr>
+              <a:buFont typeface="Arial" panose="020B0604020202020204" pitchFamily="34" charset="0"/>
+              <a:buChar char="•"/>
+            </a:pPr>
+            <a:endParaRPr lang="en-US" altLang="zh-TW" sz="1800" dirty="0"/>
+          </a:p>
+          <a:p>
+            <a:r>
+              <a:rPr lang="en-US" altLang="zh-TW" sz="1800" dirty="0">
+                <a:solidFill>
+                  <a:schemeClr val="accent1">
+                    <a:lumMod val="60000"/>
+                    <a:lumOff val="40000"/>
+                  </a:schemeClr>
+                </a:solidFill>
+              </a:rPr>
+              <a:t>*Without a resistor, many components would </a:t>
+            </a:r>
+            <a:r>
+              <a:rPr lang="en-US" altLang="zh-TW" sz="1800" b="1" dirty="0">
+                <a:solidFill>
+                  <a:schemeClr val="accent1">
+                    <a:lumMod val="60000"/>
+                    <a:lumOff val="40000"/>
+                  </a:schemeClr>
+                </a:solidFill>
+              </a:rPr>
+              <a:t>burn</a:t>
+            </a:r>
+            <a:r>
+              <a:rPr lang="en-US" altLang="zh-TW" sz="1800" dirty="0">
+                <a:solidFill>
+                  <a:schemeClr val="accent1">
+                    <a:lumMod val="60000"/>
+                    <a:lumOff val="40000"/>
+                  </a:schemeClr>
+                </a:solidFill>
+              </a:rPr>
+              <a:t>.</a:t>
+            </a:r>
+          </a:p>
+        </p:txBody>
+      </p:sp>
+      <p:sp>
+        <p:nvSpPr>
+          <p:cNvPr id="4" name="item_1"/>
+          <p:cNvSpPr txBox="1">
+            <a:spLocks noGrp="1" noRot="1" noMove="1" noResize="1" noEditPoints="1" noAdjustHandles="1" noChangeArrowheads="1" noChangeShapeType="1"/>
+          </p:cNvSpPr>
+          <p:nvPr/>
+        </p:nvSpPr>
+        <p:spPr>
+          <a:xfrm>
+            <a:off x="550333" y="1978087"/>
+            <a:ext cx="2673350" cy="294953"/>
+          </a:xfrm>
+          <a:prstGeom prst="rect">
+            <a:avLst/>
+          </a:prstGeom>
+        </p:spPr>
+        <p:txBody>
+          <a:bodyPr lIns="0" tIns="0" rIns="0" bIns="0" rtlCol="0" anchor="t">
+            <a:spAutoFit/>
+          </a:bodyPr>
+          <a:lstStyle/>
+          <a:p>
+            <a:pPr>
+              <a:lnSpc>
+                <a:spcPts val="2305"/>
+              </a:lnSpc>
+              <a:spcBef>
+                <a:spcPct val="0"/>
+              </a:spcBef>
+            </a:pPr>
+            <a:r>
+              <a:rPr lang="en-US" sz="2000" spc="-49" dirty="0">
+                <a:solidFill>
+                  <a:schemeClr val="accent2"/>
+                </a:solidFill>
+                <a:ea typeface="ITC Avant Garde Gothic"/>
+                <a:cs typeface="ITC Avant Garde Gothic"/>
+                <a:sym typeface="ITC Avant Garde Gothic"/>
+              </a:rPr>
+              <a:t>Resistor</a:t>
+            </a:r>
+          </a:p>
+        </p:txBody>
+      </p:sp>
+      <p:sp>
+        <p:nvSpPr>
+          <p:cNvPr id="7" name="item_2"/>
+          <p:cNvSpPr txBox="1">
+            <a:spLocks noGrp="1" noRot="1" noMove="1" noResize="1" noEditPoints="1" noAdjustHandles="1" noChangeArrowheads="1" noChangeShapeType="1"/>
+          </p:cNvSpPr>
+          <p:nvPr/>
+        </p:nvSpPr>
+        <p:spPr>
+          <a:xfrm>
+            <a:off x="4462403" y="1912537"/>
+            <a:ext cx="3008245" cy="294953"/>
+          </a:xfrm>
+          <a:prstGeom prst="rect">
+            <a:avLst/>
+          </a:prstGeom>
+        </p:spPr>
+        <p:txBody>
+          <a:bodyPr wrap="square" lIns="0" tIns="0" rIns="0" bIns="0" rtlCol="0" anchor="t">
+            <a:spAutoFit/>
+          </a:bodyPr>
+          <a:lstStyle/>
+          <a:p>
+            <a:pPr>
+              <a:lnSpc>
+                <a:spcPts val="2305"/>
+              </a:lnSpc>
+              <a:spcBef>
+                <a:spcPct val="0"/>
+              </a:spcBef>
+            </a:pPr>
+            <a:r>
+              <a:rPr lang="en-US" sz="2000" spc="-49" dirty="0">
+                <a:solidFill>
+                  <a:srgbClr val="00B050"/>
+                </a:solidFill>
+                <a:ea typeface="ITC Avant Garde Gothic"/>
+                <a:cs typeface="ITC Avant Garde Gothic"/>
+                <a:sym typeface="ITC Avant Garde Gothic"/>
+              </a:rPr>
+              <a:t>Capacitor</a:t>
+            </a:r>
+          </a:p>
+        </p:txBody>
+      </p:sp>
+      <p:sp>
+        <p:nvSpPr>
+          <p:cNvPr id="9" name="content_3"/>
+          <p:cNvSpPr txBox="1">
+            <a:spLocks noGrp="1" noRot="1" noMove="1" noResize="1" noEditPoints="1" noAdjustHandles="1" noChangeArrowheads="1" noChangeShapeType="1"/>
+          </p:cNvSpPr>
+          <p:nvPr/>
+        </p:nvSpPr>
+        <p:spPr>
+          <a:xfrm>
+            <a:off x="8086713" y="2692562"/>
+            <a:ext cx="2965321" cy="1938992"/>
+          </a:xfrm>
+          <a:prstGeom prst="rect">
+            <a:avLst/>
+          </a:prstGeom>
+        </p:spPr>
+        <p:txBody>
+          <a:bodyPr wrap="square" lIns="0" tIns="0" rIns="0" bIns="0" rtlCol="0" anchor="t">
+            <a:spAutoFit/>
+          </a:bodyPr>
+          <a:lstStyle/>
+          <a:p>
+            <a:r>
+              <a:rPr lang="en-US" altLang="zh-TW" sz="1800" b="1" dirty="0"/>
+              <a:t>What it does:</a:t>
+            </a:r>
+            <a:endParaRPr lang="en-US" altLang="zh-TW" sz="1800" dirty="0"/>
+          </a:p>
+          <a:p>
+            <a:pPr>
+              <a:buFont typeface="Arial" panose="020B0604020202020204" pitchFamily="34" charset="0"/>
+              <a:buChar char="•"/>
+            </a:pPr>
+            <a:r>
+              <a:rPr lang="en-US" altLang="zh-TW" sz="1800" dirty="0"/>
+              <a:t>Lights up when current flows in one direction</a:t>
+            </a:r>
+          </a:p>
+          <a:p>
+            <a:pPr>
+              <a:buFont typeface="Arial" panose="020B0604020202020204" pitchFamily="34" charset="0"/>
+              <a:buChar char="•"/>
+            </a:pPr>
+            <a:endParaRPr lang="en-US" altLang="zh-TW" sz="1800" dirty="0"/>
+          </a:p>
+          <a:p>
+            <a:r>
+              <a:rPr lang="en-US" altLang="zh-TW" sz="1800" b="1" dirty="0"/>
+              <a:t>Important rules:</a:t>
+            </a:r>
+            <a:endParaRPr lang="en-US" altLang="zh-TW" sz="1800" dirty="0"/>
+          </a:p>
+          <a:p>
+            <a:pPr>
+              <a:buFont typeface="Arial" panose="020B0604020202020204" pitchFamily="34" charset="0"/>
+              <a:buChar char="•"/>
+            </a:pPr>
+            <a:r>
+              <a:rPr lang="en-US" altLang="zh-TW" sz="1800" dirty="0"/>
+              <a:t>Has polarity (+ and −)</a:t>
+            </a:r>
+          </a:p>
+          <a:p>
+            <a:pPr>
+              <a:buFont typeface="Arial" panose="020B0604020202020204" pitchFamily="34" charset="0"/>
+              <a:buChar char="•"/>
+            </a:pPr>
+            <a:r>
+              <a:rPr lang="en-US" altLang="zh-TW" sz="1800" dirty="0"/>
+              <a:t>Always needs a </a:t>
+            </a:r>
+            <a:r>
+              <a:rPr lang="en-US" altLang="zh-TW" sz="1800" b="1" dirty="0"/>
+              <a:t>resistor</a:t>
+            </a:r>
+            <a:endParaRPr lang="en-US" altLang="zh-TW" sz="1800" dirty="0"/>
+          </a:p>
+        </p:txBody>
+      </p:sp>
+      <p:sp>
+        <p:nvSpPr>
+          <p:cNvPr id="10" name="item_3"/>
+          <p:cNvSpPr txBox="1">
+            <a:spLocks noGrp="1" noRot="1" noMove="1" noResize="1" noEditPoints="1" noAdjustHandles="1" noChangeArrowheads="1" noChangeShapeType="1"/>
+          </p:cNvSpPr>
+          <p:nvPr/>
+        </p:nvSpPr>
+        <p:spPr>
+          <a:xfrm>
+            <a:off x="8150087" y="1978087"/>
+            <a:ext cx="3518942" cy="272447"/>
+          </a:xfrm>
+          <a:prstGeom prst="rect">
+            <a:avLst/>
+          </a:prstGeom>
+        </p:spPr>
+        <p:txBody>
+          <a:bodyPr wrap="square" lIns="0" tIns="0" rIns="0" bIns="0" rtlCol="0" anchor="t">
+            <a:spAutoFit/>
+          </a:bodyPr>
+          <a:lstStyle/>
+          <a:p>
+            <a:pPr>
+              <a:lnSpc>
+                <a:spcPts val="2305"/>
+              </a:lnSpc>
+              <a:spcBef>
+                <a:spcPct val="0"/>
+              </a:spcBef>
+            </a:pPr>
+            <a:r>
+              <a:rPr lang="en-US" sz="1800" spc="-49" dirty="0">
+                <a:gradFill>
+                  <a:gsLst>
+                    <a:gs pos="0">
+                      <a:srgbClr val="FF0000"/>
+                    </a:gs>
+                    <a:gs pos="20000">
+                      <a:schemeClr val="accent2"/>
+                    </a:gs>
+                    <a:gs pos="39000">
+                      <a:srgbClr val="FFBE00"/>
+                    </a:gs>
+                    <a:gs pos="100000">
+                      <a:srgbClr val="7030A0"/>
+                    </a:gs>
+                    <a:gs pos="79000">
+                      <a:schemeClr val="accent1"/>
+                    </a:gs>
+                    <a:gs pos="59000">
+                      <a:schemeClr val="accent4">
+                        <a:lumMod val="50000"/>
+                      </a:schemeClr>
+                    </a:gs>
+                  </a:gsLst>
+                  <a:lin ang="2700000" scaled="0"/>
+                </a:gradFill>
+                <a:ea typeface="ITC Avant Garde Gothic"/>
+                <a:cs typeface="ITC Avant Garde Gothic"/>
+                <a:sym typeface="ITC Avant Garde Gothic"/>
+              </a:rPr>
+              <a:t>LED Light Emitting Diode</a:t>
+            </a:r>
+          </a:p>
+        </p:txBody>
+      </p:sp>
+      <p:sp>
+        <p:nvSpPr>
+          <p:cNvPr id="12" name="title"/>
+          <p:cNvSpPr txBox="1">
+            <a:spLocks noGrp="1" noRot="1" noMove="1" noResize="1" noEditPoints="1" noAdjustHandles="1" noChangeArrowheads="1" noChangeShapeType="1"/>
+          </p:cNvSpPr>
+          <p:nvPr/>
+        </p:nvSpPr>
+        <p:spPr>
+          <a:xfrm>
+            <a:off x="550333" y="439737"/>
+            <a:ext cx="7467600" cy="612155"/>
+          </a:xfrm>
+          <a:prstGeom prst="rect">
+            <a:avLst/>
+          </a:prstGeom>
+        </p:spPr>
+        <p:txBody>
+          <a:bodyPr lIns="0" tIns="0" rIns="0" bIns="0" rtlCol="0" anchor="t">
+            <a:spAutoFit/>
+          </a:bodyPr>
+          <a:lstStyle/>
+          <a:p>
+            <a:pPr>
+              <a:lnSpc>
+                <a:spcPts val="5334"/>
+              </a:lnSpc>
+              <a:spcBef>
+                <a:spcPct val="0"/>
+              </a:spcBef>
+            </a:pPr>
+            <a:r>
+              <a:rPr lang="en-US" altLang="zh-TW" sz="3600" b="1" dirty="0">
+                <a:solidFill>
+                  <a:srgbClr val="0070C0"/>
+                </a:solidFill>
+              </a:rPr>
+              <a:t>The 3 most common components</a:t>
+            </a:r>
+            <a:endParaRPr lang="en-US" sz="3600" b="1" spc="-160" dirty="0">
+              <a:solidFill>
+                <a:srgbClr val="0070C0"/>
+              </a:solidFill>
+              <a:ea typeface="ITC Avant Garde Gothic"/>
+              <a:cs typeface="ITC Avant Garde Gothic"/>
+              <a:sym typeface="ITC Avant Garde Gothic"/>
+            </a:endParaRPr>
+          </a:p>
+        </p:txBody>
+      </p:sp>
+      <p:cxnSp>
+        <p:nvCxnSpPr>
+          <p:cNvPr id="14" name="Straight Connector 13">
+            <a:extLst>
+              <a:ext uri="{FF2B5EF4-FFF2-40B4-BE49-F238E27FC236}">
+                <a16:creationId xmlns:a16="http://schemas.microsoft.com/office/drawing/2014/main" id="{AEC89CC0-60C4-0CF7-9091-8064CC65DC88}"/>
+              </a:ext>
+            </a:extLst>
+          </p:cNvPr>
+          <p:cNvCxnSpPr>
+            <a:cxnSpLocks noGrp="1" noRot="1" noMove="1" noResize="1" noEditPoints="1" noAdjustHandles="1" noChangeArrowheads="1" noChangeShapeType="1"/>
+          </p:cNvCxnSpPr>
+          <p:nvPr/>
+        </p:nvCxnSpPr>
+        <p:spPr>
+          <a:xfrm flipV="1">
+            <a:off x="0" y="2392230"/>
+            <a:ext cx="12197554" cy="10583"/>
+          </a:xfrm>
+          <a:prstGeom prst="line">
+            <a:avLst/>
+          </a:prstGeom>
+        </p:spPr>
+        <p:style>
+          <a:lnRef idx="1">
+            <a:schemeClr val="accent1"/>
+          </a:lnRef>
+          <a:fillRef idx="0">
+            <a:schemeClr val="accent1"/>
+          </a:fillRef>
+          <a:effectRef idx="0">
+            <a:schemeClr val="accent1"/>
+          </a:effectRef>
+          <a:fontRef idx="minor">
+            <a:schemeClr val="tx1"/>
+          </a:fontRef>
+        </p:style>
+      </p:cxnSp>
+      <p:sp>
+        <p:nvSpPr>
+          <p:cNvPr id="23" name="content_2">
+            <a:extLst>
+              <a:ext uri="{FF2B5EF4-FFF2-40B4-BE49-F238E27FC236}">
+                <a16:creationId xmlns:a16="http://schemas.microsoft.com/office/drawing/2014/main" id="{CDE7A42B-42D1-7C67-D891-4B400111A421}"/>
+              </a:ext>
+            </a:extLst>
+          </p:cNvPr>
+          <p:cNvSpPr txBox="1">
+            <a:spLocks noGrp="1" noRot="1" noMove="1" noResize="1" noEditPoints="1" noAdjustHandles="1" noChangeArrowheads="1" noChangeShapeType="1"/>
+          </p:cNvSpPr>
+          <p:nvPr/>
+        </p:nvSpPr>
+        <p:spPr>
+          <a:xfrm>
+            <a:off x="4196779" y="2667221"/>
+            <a:ext cx="2965321" cy="2585323"/>
+          </a:xfrm>
+          <a:prstGeom prst="rect">
+            <a:avLst/>
+          </a:prstGeom>
+          <a:noFill/>
+        </p:spPr>
+        <p:txBody>
+          <a:bodyPr wrap="square">
+            <a:spAutoFit/>
+          </a:bodyPr>
+          <a:lstStyle/>
+          <a:p>
+            <a:r>
+              <a:rPr lang="en-US" altLang="zh-TW" sz="1800" b="1" dirty="0"/>
+              <a:t>What it does:</a:t>
+            </a:r>
+            <a:endParaRPr lang="en-US" altLang="zh-TW" sz="1800" dirty="0"/>
+          </a:p>
+          <a:p>
+            <a:pPr>
+              <a:buFont typeface="Arial" panose="020B0604020202020204" pitchFamily="34" charset="0"/>
+              <a:buChar char="•"/>
+            </a:pPr>
+            <a:r>
+              <a:rPr lang="en-US" altLang="zh-TW" sz="1800" dirty="0"/>
+              <a:t>Stores a small amount of charge</a:t>
+            </a:r>
+          </a:p>
+          <a:p>
+            <a:pPr>
+              <a:buFont typeface="Arial" panose="020B0604020202020204" pitchFamily="34" charset="0"/>
+              <a:buChar char="•"/>
+            </a:pPr>
+            <a:r>
+              <a:rPr lang="en-US" altLang="zh-TW" sz="1800" dirty="0"/>
+              <a:t>Smooths voltage</a:t>
+            </a:r>
+          </a:p>
+          <a:p>
+            <a:pPr>
+              <a:buFont typeface="Arial" panose="020B0604020202020204" pitchFamily="34" charset="0"/>
+              <a:buChar char="•"/>
+            </a:pPr>
+            <a:r>
+              <a:rPr lang="en-US" altLang="zh-TW" sz="1800" dirty="0"/>
+              <a:t>Blocks DC, passes AC (for now: “filters noise”)</a:t>
+            </a:r>
+          </a:p>
+          <a:p>
+            <a:pPr>
+              <a:buFont typeface="Arial" panose="020B0604020202020204" pitchFamily="34" charset="0"/>
+              <a:buChar char="•"/>
+            </a:pPr>
+            <a:endParaRPr lang="en-US" altLang="zh-TW" sz="1800" dirty="0"/>
+          </a:p>
+          <a:p>
+            <a:r>
+              <a:rPr lang="en-US" altLang="zh-TW" sz="1800" dirty="0">
+                <a:solidFill>
+                  <a:schemeClr val="accent1">
+                    <a:lumMod val="60000"/>
+                    <a:lumOff val="40000"/>
+                  </a:schemeClr>
+                </a:solidFill>
+              </a:rPr>
+              <a:t>*A shock absorber for voltage</a:t>
+            </a:r>
+          </a:p>
+        </p:txBody>
+      </p:sp>
+    </p:spTree>
+    <p:extLst>
+      <p:ext uri="{BB962C8B-B14F-4D97-AF65-F5344CB8AC3E}">
+        <p14:creationId xmlns:p14="http://schemas.microsoft.com/office/powerpoint/2010/main" val="751388697"/>
+      </p:ext>
+    </p:extLst>
+  </p:cSld>
+  <p:clrMapOvr>
+    <a:masterClrMapping/>
+  </p:clrMapOvr>
+  <mc:AlternateContent xmlns:mc="http://schemas.openxmlformats.org/markup-compatibility/2006">
+    <mc:Choice xmlns:p159="http://schemas.microsoft.com/office/powerpoint/2015/09/main" Requires="p159">
+      <p:transition spd="slow">
+        <p159:morph option="byObject"/>
+      </p:transition>
+    </mc:Choice>
+    <mc:Fallback>
+      <p:transition spd="slow">
+        <p:fade/>
+      </p:transition>
+    </mc:Fallback>
+  </mc:AlternateContent>
+</p:sld>
+</file>
+
+<file path=ppt/slides/slide7.xml><?xml version="1.0" encoding="utf-8"?>
 <p:sld xmlns:a="http://schemas.openxmlformats.org/drawingml/2006/main" xmlns:r="http://schemas.openxmlformats.org/officeDocument/2006/relationships" xmlns:p="http://schemas.openxmlformats.org/presentationml/2006/main">
   <p:cSld>
     <p:spTree>
@@ -26641,7 +27379,9 @@
               </a:ext>
             </a:extLst>
           </p:cNvPr>
-          <p:cNvSpPr txBox="1"/>
+          <p:cNvSpPr txBox="1">
+            <a:spLocks noGrp="1" noRot="1" noMove="1" noResize="1" noEditPoints="1" noAdjustHandles="1" noChangeArrowheads="1" noChangeShapeType="1"/>
+          </p:cNvSpPr>
           <p:nvPr/>
         </p:nvSpPr>
         <p:spPr>
@@ -26693,7 +27433,9 @@
               </a:ext>
             </a:extLst>
           </p:cNvPr>
-          <p:cNvSpPr txBox="1"/>
+          <p:cNvSpPr txBox="1">
+            <a:spLocks noGrp="1" noRot="1" noMove="1" noResize="1" noEditPoints="1" noAdjustHandles="1" noChangeArrowheads="1" noChangeShapeType="1"/>
+          </p:cNvSpPr>
           <p:nvPr/>
         </p:nvSpPr>
         <p:spPr>
@@ -26761,7 +27503,7 @@
 </p:sld>
 </file>
 
-<file path=ppt/slides/slide7.xml><?xml version="1.0" encoding="utf-8"?>
+<file path=ppt/slides/slide8.xml><?xml version="1.0" encoding="utf-8"?>
 <p:sld xmlns:a="http://schemas.openxmlformats.org/drawingml/2006/main" xmlns:r="http://schemas.openxmlformats.org/officeDocument/2006/relationships" xmlns:p="http://schemas.openxmlformats.org/presentationml/2006/main">
   <p:cSld>
     <p:spTree>
@@ -27586,7 +28328,7 @@
 </p:sld>
 </file>
 
-<file path=ppt/slides/slide8.xml><?xml version="1.0" encoding="utf-8"?>
+<file path=ppt/slides/slide9.xml><?xml version="1.0" encoding="utf-8"?>
 <p:sld xmlns:a="http://schemas.openxmlformats.org/drawingml/2006/main" xmlns:r="http://schemas.openxmlformats.org/officeDocument/2006/relationships" xmlns:p="http://schemas.openxmlformats.org/presentationml/2006/main">
   <p:cSld>
     <p:spTree>
@@ -28086,370 +28828,6 @@
     <p:extLst>
       <p:ext uri="{BB962C8B-B14F-4D97-AF65-F5344CB8AC3E}">
         <p14:creationId xmlns:p14="http://schemas.microsoft.com/office/powerpoint/2010/main" val="621181906"/>
-      </p:ext>
-    </p:extLst>
-  </p:cSld>
-  <p:clrMapOvr>
-    <a:masterClrMapping/>
-  </p:clrMapOvr>
-  <mc:AlternateContent xmlns:mc="http://schemas.openxmlformats.org/markup-compatibility/2006" xmlns:p159="http://schemas.microsoft.com/office/powerpoint/2015/09/main">
-    <mc:Choice Requires="p159">
-      <p:transition spd="slow">
-        <p159:morph option="byObject"/>
-      </p:transition>
-    </mc:Choice>
-    <mc:Fallback xmlns="">
-      <p:transition spd="slow">
-        <p:fade/>
-      </p:transition>
-    </mc:Fallback>
-  </mc:AlternateContent>
-</p:sld>
-</file>
-
-<file path=ppt/slides/slide9.xml><?xml version="1.0" encoding="utf-8"?>
-<p:sld xmlns:a="http://schemas.openxmlformats.org/drawingml/2006/main" xmlns:r="http://schemas.openxmlformats.org/officeDocument/2006/relationships" xmlns:p="http://schemas.openxmlformats.org/presentationml/2006/main">
-  <p:cSld>
-    <p:spTree>
-      <p:nvGrpSpPr>
-        <p:cNvPr id="1" name=""/>
-        <p:cNvGrpSpPr/>
-        <p:nvPr/>
-      </p:nvGrpSpPr>
-      <p:grpSpPr>
-        <a:xfrm>
-          <a:off x="0" y="0"/>
-          <a:ext cx="0" cy="0"/>
-          <a:chOff x="0" y="0"/>
-          <a:chExt cx="0" cy="0"/>
-        </a:xfrm>
-      </p:grpSpPr>
-      <p:sp>
-        <p:nvSpPr>
-          <p:cNvPr id="6" name="矩形: 剪去同側角落 5">
-            <a:extLst>
-              <a:ext uri="{FF2B5EF4-FFF2-40B4-BE49-F238E27FC236}">
-                <a16:creationId xmlns:a16="http://schemas.microsoft.com/office/drawing/2014/main" id="{7DD451AF-4BE3-F133-220D-15D8F4777B7F}"/>
-              </a:ext>
-            </a:extLst>
-          </p:cNvPr>
-          <p:cNvSpPr>
-            <a:spLocks noGrp="1" noRot="1" noMove="1" noResize="1" noEditPoints="1" noAdjustHandles="1" noChangeArrowheads="1" noChangeShapeType="1"/>
-          </p:cNvSpPr>
-          <p:nvPr/>
-        </p:nvSpPr>
-        <p:spPr>
-          <a:xfrm rot="5400000">
-            <a:off x="1803043" y="-1574799"/>
-            <a:ext cx="630936" cy="4237022"/>
-          </a:xfrm>
-          <a:prstGeom prst="snip2SameRect">
-            <a:avLst/>
-          </a:prstGeom>
-          <a:ln>
-            <a:noFill/>
-          </a:ln>
-        </p:spPr>
-        <p:style>
-          <a:lnRef idx="2">
-            <a:schemeClr val="accent1">
-              <a:shade val="15000"/>
-            </a:schemeClr>
-          </a:lnRef>
-          <a:fillRef idx="1">
-            <a:schemeClr val="accent1"/>
-          </a:fillRef>
-          <a:effectRef idx="0">
-            <a:schemeClr val="accent1"/>
-          </a:effectRef>
-          <a:fontRef idx="minor">
-            <a:schemeClr val="lt1"/>
-          </a:fontRef>
-        </p:style>
-        <p:txBody>
-          <a:bodyPr rtlCol="0" anchor="ctr"/>
-          <a:lstStyle/>
-          <a:p>
-            <a:pPr algn="ctr"/>
-            <a:endParaRPr lang="zh-TW" altLang="en-US"/>
-          </a:p>
-        </p:txBody>
-      </p:sp>
-      <p:sp>
-        <p:nvSpPr>
-          <p:cNvPr id="7" name="title">
-            <a:extLst>
-              <a:ext uri="{FF2B5EF4-FFF2-40B4-BE49-F238E27FC236}">
-                <a16:creationId xmlns:a16="http://schemas.microsoft.com/office/drawing/2014/main" id="{4D295F0A-4B33-7EE4-3A92-97EB6962CF5D}"/>
-              </a:ext>
-            </a:extLst>
-          </p:cNvPr>
-          <p:cNvSpPr txBox="1"/>
-          <p:nvPr/>
-        </p:nvSpPr>
-        <p:spPr>
-          <a:xfrm>
-            <a:off x="276986" y="281007"/>
-            <a:ext cx="4394602" cy="471091"/>
-          </a:xfrm>
-          <a:prstGeom prst="rect">
-            <a:avLst/>
-          </a:prstGeom>
-        </p:spPr>
-        <p:txBody>
-          <a:bodyPr wrap="square" lIns="0" tIns="0" rIns="0" bIns="0" rtlCol="0" anchor="t">
-            <a:spAutoFit/>
-          </a:bodyPr>
-          <a:lstStyle/>
-          <a:p>
-            <a:pPr>
-              <a:lnSpc>
-                <a:spcPct val="115000"/>
-              </a:lnSpc>
-              <a:spcAft>
-                <a:spcPts val="800"/>
-              </a:spcAft>
-            </a:pPr>
-            <a:r>
-              <a:rPr lang="en-US" altLang="zh-TW" sz="2800" b="1" kern="100" dirty="0">
-                <a:solidFill>
-                  <a:schemeClr val="bg1"/>
-                </a:solidFill>
-                <a:effectLst/>
-                <a:latin typeface="Aptos" panose="020B0004020202020204" pitchFamily="34" charset="0"/>
-                <a:ea typeface="新細明體" panose="02020500000000000000" pitchFamily="18" charset="-120"/>
-                <a:cs typeface="Times New Roman" panose="02020603050405020304" pitchFamily="18" charset="0"/>
-              </a:rPr>
-              <a:t>Decoupling capacitors</a:t>
-            </a:r>
-            <a:endParaRPr lang="zh-TW" altLang="zh-TW" sz="2800" kern="100" dirty="0">
-              <a:solidFill>
-                <a:schemeClr val="bg1"/>
-              </a:solidFill>
-              <a:effectLst/>
-              <a:latin typeface="Aptos" panose="020B0004020202020204" pitchFamily="34" charset="0"/>
-              <a:ea typeface="新細明體" panose="02020500000000000000" pitchFamily="18" charset="-120"/>
-              <a:cs typeface="Times New Roman" panose="02020603050405020304" pitchFamily="18" charset="0"/>
-            </a:endParaRPr>
-          </a:p>
-        </p:txBody>
-      </p:sp>
-      <p:sp>
-        <p:nvSpPr>
-          <p:cNvPr id="9" name="content">
-            <a:extLst>
-              <a:ext uri="{FF2B5EF4-FFF2-40B4-BE49-F238E27FC236}">
-                <a16:creationId xmlns:a16="http://schemas.microsoft.com/office/drawing/2014/main" id="{B328E9C1-4D32-5B78-02D9-93DA0D3A1E85}"/>
-              </a:ext>
-            </a:extLst>
-          </p:cNvPr>
-          <p:cNvSpPr txBox="1"/>
-          <p:nvPr/>
-        </p:nvSpPr>
-        <p:spPr>
-          <a:xfrm>
-            <a:off x="877355" y="1650275"/>
-            <a:ext cx="5146217" cy="3557449"/>
-          </a:xfrm>
-          <a:prstGeom prst="rect">
-            <a:avLst/>
-          </a:prstGeom>
-          <a:noFill/>
-        </p:spPr>
-        <p:txBody>
-          <a:bodyPr wrap="square">
-            <a:spAutoFit/>
-          </a:bodyPr>
-          <a:lstStyle/>
-          <a:p>
-            <a:pPr>
-              <a:lnSpc>
-                <a:spcPct val="115000"/>
-              </a:lnSpc>
-              <a:spcAft>
-                <a:spcPts val="800"/>
-              </a:spcAft>
-            </a:pPr>
-            <a:r>
-              <a:rPr lang="en-US" altLang="zh-TW" sz="2400" b="1" kern="100" dirty="0">
-                <a:effectLst/>
-                <a:latin typeface="Aptos" panose="020B0004020202020204" pitchFamily="34" charset="0"/>
-                <a:ea typeface="新細明體" panose="02020500000000000000" pitchFamily="18" charset="-120"/>
-                <a:cs typeface="Times New Roman" panose="02020603050405020304" pitchFamily="18" charset="0"/>
-              </a:rPr>
-              <a:t>Near every IC, Why?</a:t>
-            </a:r>
-          </a:p>
-          <a:p>
-            <a:pPr marL="342900" lvl="0" indent="-342900">
-              <a:lnSpc>
-                <a:spcPct val="115000"/>
-              </a:lnSpc>
-              <a:spcAft>
-                <a:spcPts val="800"/>
-              </a:spcAft>
-              <a:buSzPts val="1000"/>
-              <a:buFont typeface="Symbol" panose="05050102010706020507" pitchFamily="18" charset="2"/>
-              <a:buChar char=""/>
-              <a:tabLst>
-                <a:tab pos="457200" algn="l"/>
-              </a:tabLst>
-            </a:pPr>
-            <a:r>
-              <a:rPr lang="en-US" altLang="zh-TW" sz="2400" kern="100" dirty="0">
-                <a:effectLst/>
-                <a:latin typeface="Aptos" panose="020B0004020202020204" pitchFamily="34" charset="0"/>
-                <a:ea typeface="新細明體" panose="02020500000000000000" pitchFamily="18" charset="-120"/>
-                <a:cs typeface="Times New Roman" panose="02020603050405020304" pitchFamily="18" charset="0"/>
-              </a:rPr>
-              <a:t>ICs need stable voltage</a:t>
-            </a:r>
-            <a:endParaRPr lang="zh-TW" altLang="zh-TW" sz="2400" kern="100" dirty="0">
-              <a:effectLst/>
-              <a:latin typeface="Aptos" panose="020B0004020202020204" pitchFamily="34" charset="0"/>
-              <a:ea typeface="新細明體" panose="02020500000000000000" pitchFamily="18" charset="-120"/>
-              <a:cs typeface="Times New Roman" panose="02020603050405020304" pitchFamily="18" charset="0"/>
-            </a:endParaRPr>
-          </a:p>
-          <a:p>
-            <a:pPr marL="342900" lvl="0" indent="-342900">
-              <a:lnSpc>
-                <a:spcPct val="115000"/>
-              </a:lnSpc>
-              <a:spcAft>
-                <a:spcPts val="800"/>
-              </a:spcAft>
-              <a:buSzPts val="1000"/>
-              <a:buFont typeface="Symbol" panose="05050102010706020507" pitchFamily="18" charset="2"/>
-              <a:buChar char=""/>
-              <a:tabLst>
-                <a:tab pos="457200" algn="l"/>
-              </a:tabLst>
-            </a:pPr>
-            <a:r>
-              <a:rPr lang="en-US" altLang="zh-TW" sz="2400" kern="100" dirty="0">
-                <a:effectLst/>
-                <a:latin typeface="Aptos" panose="020B0004020202020204" pitchFamily="34" charset="0"/>
-                <a:ea typeface="新細明體" panose="02020500000000000000" pitchFamily="18" charset="-120"/>
-                <a:cs typeface="Times New Roman" panose="02020603050405020304" pitchFamily="18" charset="0"/>
-              </a:rPr>
-              <a:t>Capacitors absorb noise and spikes</a:t>
-            </a:r>
-          </a:p>
-          <a:p>
-            <a:pPr marL="342900" lvl="0" indent="-342900">
-              <a:lnSpc>
-                <a:spcPct val="115000"/>
-              </a:lnSpc>
-              <a:spcAft>
-                <a:spcPts val="800"/>
-              </a:spcAft>
-              <a:buSzPts val="1000"/>
-              <a:buFont typeface="Symbol" panose="05050102010706020507" pitchFamily="18" charset="2"/>
-              <a:buChar char=""/>
-              <a:tabLst>
-                <a:tab pos="457200" algn="l"/>
-              </a:tabLst>
-            </a:pPr>
-            <a:endParaRPr lang="zh-TW" altLang="zh-TW" sz="2400" kern="100" dirty="0">
-              <a:effectLst/>
-              <a:latin typeface="Aptos" panose="020B0004020202020204" pitchFamily="34" charset="0"/>
-              <a:ea typeface="新細明體" panose="02020500000000000000" pitchFamily="18" charset="-120"/>
-              <a:cs typeface="Times New Roman" panose="02020603050405020304" pitchFamily="18" charset="0"/>
-            </a:endParaRPr>
-          </a:p>
-          <a:p>
-            <a:pPr>
-              <a:lnSpc>
-                <a:spcPct val="115000"/>
-              </a:lnSpc>
-              <a:spcAft>
-                <a:spcPts val="800"/>
-              </a:spcAft>
-            </a:pPr>
-            <a:r>
-              <a:rPr lang="en-US" altLang="zh-TW" sz="2400" kern="100" dirty="0">
-                <a:effectLst/>
-                <a:latin typeface="Aptos" panose="020B0004020202020204" pitchFamily="34" charset="0"/>
-                <a:ea typeface="新細明體" panose="02020500000000000000" pitchFamily="18" charset="-120"/>
-                <a:cs typeface="Times New Roman" panose="02020603050405020304" pitchFamily="18" charset="0"/>
-              </a:rPr>
-              <a:t>Beginner takeaway:</a:t>
-            </a:r>
-            <a:endParaRPr lang="zh-TW" altLang="zh-TW" sz="2400" kern="100" dirty="0">
-              <a:effectLst/>
-              <a:latin typeface="Aptos" panose="020B0004020202020204" pitchFamily="34" charset="0"/>
-              <a:ea typeface="新細明體" panose="02020500000000000000" pitchFamily="18" charset="-120"/>
-              <a:cs typeface="Times New Roman" panose="02020603050405020304" pitchFamily="18" charset="0"/>
-            </a:endParaRPr>
-          </a:p>
-          <a:p>
-            <a:pPr>
-              <a:lnSpc>
-                <a:spcPct val="115000"/>
-              </a:lnSpc>
-              <a:spcAft>
-                <a:spcPts val="800"/>
-              </a:spcAft>
-            </a:pPr>
-            <a:r>
-              <a:rPr lang="en-US" altLang="zh-TW" sz="2400" kern="100" dirty="0">
-                <a:effectLst/>
-                <a:latin typeface="Aptos" panose="020B0004020202020204" pitchFamily="34" charset="0"/>
-                <a:ea typeface="新細明體" panose="02020500000000000000" pitchFamily="18" charset="-120"/>
-                <a:cs typeface="Times New Roman" panose="02020603050405020304" pitchFamily="18" charset="0"/>
-              </a:rPr>
-              <a:t>Capacitors are “local energy buffers”</a:t>
-            </a:r>
-            <a:endParaRPr lang="zh-TW" altLang="zh-TW" sz="2400" kern="100" dirty="0">
-              <a:effectLst/>
-              <a:latin typeface="Aptos" panose="020B0004020202020204" pitchFamily="34" charset="0"/>
-              <a:ea typeface="新細明體" panose="02020500000000000000" pitchFamily="18" charset="-120"/>
-              <a:cs typeface="Times New Roman" panose="02020603050405020304" pitchFamily="18" charset="0"/>
-            </a:endParaRPr>
-          </a:p>
-        </p:txBody>
-      </p:sp>
-      <p:pic>
-        <p:nvPicPr>
-          <p:cNvPr id="13" name="img" descr="一張含有 電子產品, 電路, 電子元件, 電路元件 的圖片&#10;&#10;AI 產生的內容可能不正確。">
-            <a:extLst>
-              <a:ext uri="{FF2B5EF4-FFF2-40B4-BE49-F238E27FC236}">
-                <a16:creationId xmlns:a16="http://schemas.microsoft.com/office/drawing/2014/main" id="{D05F9D7F-CA52-F6F8-435B-90A6E7480AD5}"/>
-              </a:ext>
-            </a:extLst>
-          </p:cNvPr>
-          <p:cNvPicPr>
-            <a:picLocks noChangeAspect="1"/>
-          </p:cNvPicPr>
-          <p:nvPr/>
-        </p:nvPicPr>
-        <p:blipFill>
-          <a:blip r:embed="rId2">
-            <a:extLst>
-              <a:ext uri="{28A0092B-C50C-407E-A947-70E740481C1C}">
-                <a14:useLocalDpi xmlns:a14="http://schemas.microsoft.com/office/drawing/2010/main" val="0"/>
-              </a:ext>
-            </a:extLst>
-          </a:blip>
-          <a:stretch>
-            <a:fillRect/>
-          </a:stretch>
-        </p:blipFill>
-        <p:spPr>
-          <a:xfrm>
-            <a:off x="6655202" y="1850356"/>
-            <a:ext cx="4750963" cy="3157286"/>
-          </a:xfrm>
-          <a:prstGeom prst="rect">
-            <a:avLst/>
-          </a:prstGeom>
-        </p:spPr>
-      </p:pic>
-    </p:spTree>
-    <p:extLst>
-      <p:ext uri="{BB962C8B-B14F-4D97-AF65-F5344CB8AC3E}">
-        <p14:creationId xmlns:p14="http://schemas.microsoft.com/office/powerpoint/2010/main" val="1882002090"/>
       </p:ext>
     </p:extLst>
   </p:cSld>
@@ -28997,15 +29375,6 @@
 </file>
 
 <file path=customXml/item2.xml><?xml version="1.0" encoding="utf-8"?>
-<?mso-contentType ?>
-<FormTemplates xmlns="http://schemas.microsoft.com/sharepoint/v3/contenttype/forms">
-  <Display>DocumentLibraryForm</Display>
-  <Edit>DocumentLibraryForm</Edit>
-  <New>DocumentLibraryForm</New>
-</FormTemplates>
-</file>
-
-<file path=customXml/item3.xml><?xml version="1.0" encoding="utf-8"?>
 <ct:contentTypeSchema xmlns:ct="http://schemas.microsoft.com/office/2006/metadata/contentType" xmlns:ma="http://schemas.microsoft.com/office/2006/metadata/properties/metaAttributes" ct:_="" ma:_="" ma:contentTypeName="Document" ma:contentTypeID="0x01010090C1A6ACEABD7442B1C9ED28EAB6C5DB" ma:contentTypeVersion="10" ma:contentTypeDescription="Create a new document." ma:contentTypeScope="" ma:versionID="2c83e620360763aa9bb6ca6f6e90dabe">
   <xsd:schema xmlns:xsd="http://www.w3.org/2001/XMLSchema" xmlns:xs="http://www.w3.org/2001/XMLSchema" xmlns:p="http://schemas.microsoft.com/office/2006/metadata/properties" xmlns:ns2="8a3f5d65-52d1-40ef-a941-5f46bf66d567" xmlns:ns3="0ba46b80-6b01-4346-9b2c-03da308a0634" targetNamespace="http://schemas.microsoft.com/office/2006/metadata/properties" ma:root="true" ma:fieldsID="f21e7a31f88a4c502cacedf435dd6efe" ns2:_="" ns3:_="">
     <xsd:import namespace="8a3f5d65-52d1-40ef-a941-5f46bf66d567"/>
@@ -29194,6 +29563,15 @@
 </ct:contentTypeSchema>
 </file>
 
+<file path=customXml/item3.xml><?xml version="1.0" encoding="utf-8"?>
+<?mso-contentType ?>
+<FormTemplates xmlns="http://schemas.microsoft.com/sharepoint/v3/contenttype/forms">
+  <Display>DocumentLibraryForm</Display>
+  <Edit>DocumentLibraryForm</Edit>
+  <New>DocumentLibraryForm</New>
+</FormTemplates>
+</file>
+
 <file path=customXml/itemProps1.xml><?xml version="1.0" encoding="utf-8"?>
 <ds:datastoreItem xmlns:ds="http://schemas.openxmlformats.org/officeDocument/2006/customXml" ds:itemID="{8AAED483-C87A-4A4D-97D9-4D668F30684D}">
   <ds:schemaRefs>
@@ -29206,14 +29584,6 @@
 </file>
 
 <file path=customXml/itemProps2.xml><?xml version="1.0" encoding="utf-8"?>
-<ds:datastoreItem xmlns:ds="http://schemas.openxmlformats.org/officeDocument/2006/customXml" ds:itemID="{04ECE26A-46C9-411F-8B9D-26BC5CDC55C0}">
-  <ds:schemaRefs>
-    <ds:schemaRef ds:uri="http://schemas.microsoft.com/sharepoint/v3/contenttype/forms"/>
-  </ds:schemaRefs>
-</ds:datastoreItem>
-</file>
-
-<file path=customXml/itemProps3.xml><?xml version="1.0" encoding="utf-8"?>
 <ds:datastoreItem xmlns:ds="http://schemas.openxmlformats.org/officeDocument/2006/customXml" ds:itemID="{B0EC0026-1517-457D-8D55-FDA8F64F7ACC}">
   <ds:schemaRefs>
     <ds:schemaRef ds:uri="http://schemas.microsoft.com/office/2006/metadata/contentType"/>
@@ -29230,4 +29600,12 @@
     <ds:schemaRef ds:uri="http://schemas.microsoft.com/internal/obd"/>
   </ds:schemaRefs>
 </ds:datastoreItem>
+</file>
+
+<file path=customXml/itemProps3.xml><?xml version="1.0" encoding="utf-8"?>
+<ds:datastoreItem xmlns:ds="http://schemas.openxmlformats.org/officeDocument/2006/customXml" ds:itemID="{04ECE26A-46C9-411F-8B9D-26BC5CDC55C0}">
+  <ds:schemaRefs>
+    <ds:schemaRef ds:uri="http://schemas.microsoft.com/sharepoint/v3/contenttype/forms"/>
+  </ds:schemaRefs>
+</ds:datastoreItem>
 </file>
--- a/template.pptx
+++ b/template.pptx
@@ -10523,7 +10523,7 @@
           </a:lstStyle>
           <a:p>
             <a:fld id="{7C7898EE-D06A-48FC-AF05-8BC54DC9F027}" type="datetimeFigureOut">
-              <a:t>2026/3/25</a:t>
+              <a:t>2026/3/31</a:t>
             </a:fld>
             <a:endParaRPr lang="zh-TW" altLang="en-US"/>
           </a:p>
@@ -19457,7 +19457,7 @@
           <a:p>
             <a:fld id="{9275EF9D-446A-4BA9-9A8F-8795C824CFA3}" type="datetimeFigureOut">
               <a:rPr lang="zh-TW" altLang="en-US" smtClean="0"/>
-              <a:t>2026/3/25</a:t>
+              <a:t>2026/3/31</a:t>
             </a:fld>
             <a:endParaRPr lang="zh-TW" altLang="en-US"/>
           </a:p>
@@ -20075,7 +20075,7 @@
       </p:grpSpPr>
       <p:sp>
         <p:nvSpPr>
-          <p:cNvPr id="6" name="矩形: 剪去同側角落 5">
+          <p:cNvPr id="6" name="矩形: 剪去同側角落">
             <a:extLst>
               <a:ext uri="{FF2B5EF4-FFF2-40B4-BE49-F238E27FC236}">
                 <a16:creationId xmlns:a16="http://schemas.microsoft.com/office/drawing/2014/main" id="{7DD451AF-4BE3-F133-220D-15D8F4777B7F}"/>
@@ -20083,7 +20083,7 @@
             </a:extLst>
           </p:cNvPr>
           <p:cNvSpPr>
-            <a:spLocks noGrp="1" noRot="1" noMove="1" noResize="1" noEditPoints="1" noAdjustHandles="1" noChangeArrowheads="1" noChangeShapeType="1"/>
+            <a:spLocks/>
           </p:cNvSpPr>
           <p:nvPr/>
         </p:nvSpPr>
@@ -21885,7 +21885,7 @@
         </p:nvSpPr>
         <p:spPr>
           <a:xfrm>
-            <a:off x="1164882" y="4095808"/>
+            <a:off x="1164882" y="3778733"/>
             <a:ext cx="3419588" cy="1550746"/>
           </a:xfrm>
           <a:prstGeom prst="rect">
@@ -22001,7 +22001,7 @@
         </p:nvSpPr>
         <p:spPr>
           <a:xfrm>
-            <a:off x="7138657" y="4095808"/>
+            <a:off x="7138657" y="3778733"/>
             <a:ext cx="4047535" cy="1550746"/>
           </a:xfrm>
           <a:prstGeom prst="rect">
@@ -23416,7 +23416,7 @@
       </p:grpSpPr>
       <p:sp>
         <p:nvSpPr>
-          <p:cNvPr id="2" name="矩形: 剪去同側角落 1">
+          <p:cNvPr id="2" name="矩形: 剪去同側角落">
             <a:extLst>
               <a:ext uri="{FF2B5EF4-FFF2-40B4-BE49-F238E27FC236}">
                 <a16:creationId xmlns:a16="http://schemas.microsoft.com/office/drawing/2014/main" id="{B75BE523-0625-07DE-3900-9DA5D3F70815}"/>
@@ -23590,7 +23590,7 @@
       </p:grpSpPr>
       <p:sp>
         <p:nvSpPr>
-          <p:cNvPr id="2" name="矩形: 剪去同側角落 1">
+          <p:cNvPr id="2" name="矩形: 剪去同側角落">
             <a:extLst>
               <a:ext uri="{FF2B5EF4-FFF2-40B4-BE49-F238E27FC236}">
                 <a16:creationId xmlns:a16="http://schemas.microsoft.com/office/drawing/2014/main" id="{B75BE523-0625-07DE-3900-9DA5D3F70815}"/>
@@ -23764,7 +23764,7 @@
       </p:grpSpPr>
       <p:sp>
         <p:nvSpPr>
-          <p:cNvPr id="2" name="矩形: 剪去同側角落 1">
+          <p:cNvPr id="2" name="矩形: 剪去同側角落">
             <a:extLst>
               <a:ext uri="{FF2B5EF4-FFF2-40B4-BE49-F238E27FC236}">
                 <a16:creationId xmlns:a16="http://schemas.microsoft.com/office/drawing/2014/main" id="{B75BE523-0625-07DE-3900-9DA5D3F70815}"/>
@@ -26740,13 +26740,13 @@
   <p:clrMapOvr>
     <a:masterClrMapping/>
   </p:clrMapOvr>
-  <mc:AlternateContent xmlns:mc="http://schemas.openxmlformats.org/markup-compatibility/2006">
-    <mc:Choice xmlns:p159="http://schemas.microsoft.com/office/powerpoint/2015/09/main" Requires="p159">
+  <mc:AlternateContent xmlns:mc="http://schemas.openxmlformats.org/markup-compatibility/2006" xmlns:p159="http://schemas.microsoft.com/office/powerpoint/2015/09/main">
+    <mc:Choice Requires="p159">
       <p:transition spd="slow">
         <p159:morph option="byObject"/>
       </p:transition>
     </mc:Choice>
-    <mc:Fallback>
+    <mc:Fallback xmlns="">
       <p:transition spd="slow">
         <p:fade/>
       </p:transition>
@@ -26774,22 +26774,24 @@
       </p:grpSpPr>
       <p:sp>
         <p:nvSpPr>
-          <p:cNvPr id="4" name="矩形: 剪去單一角落 3">
+          <p:cNvPr id="2" name="矩形: 剪去同側角落">
             <a:extLst>
               <a:ext uri="{FF2B5EF4-FFF2-40B4-BE49-F238E27FC236}">
-                <a16:creationId xmlns:a16="http://schemas.microsoft.com/office/drawing/2014/main" id="{E25BC43C-499A-BD91-172C-099868A83C60}"/>
+                <a16:creationId xmlns:a16="http://schemas.microsoft.com/office/drawing/2014/main" id="{C069FB36-4268-2008-2651-77DC57C82F93}"/>
               </a:ext>
             </a:extLst>
           </p:cNvPr>
-          <p:cNvSpPr/>
+          <p:cNvSpPr>
+            <a:spLocks noGrp="1" noRot="1" noMove="1" noResize="1" noEditPoints="1" noAdjustHandles="1" noChangeArrowheads="1" noChangeShapeType="1"/>
+          </p:cNvSpPr>
           <p:nvPr/>
         </p:nvSpPr>
         <p:spPr>
-          <a:xfrm>
-            <a:off x="-13977" y="226337"/>
-            <a:ext cx="2865820" cy="606582"/>
+          <a:xfrm rot="5400000">
+            <a:off x="1065757" y="-837514"/>
+            <a:ext cx="630936" cy="2762451"/>
           </a:xfrm>
-          <a:prstGeom prst="snip1Rect">
+          <a:prstGeom prst="snip2SameRect">
             <a:avLst/>
           </a:prstGeom>
           <a:ln>
@@ -27387,7 +27389,7 @@
         <p:spPr>
           <a:xfrm>
             <a:off x="545240" y="1847273"/>
-            <a:ext cx="2678251" cy="430887"/>
+            <a:ext cx="5177058" cy="430887"/>
           </a:xfrm>
           <a:prstGeom prst="rect">
             <a:avLst/>
@@ -27441,7 +27443,7 @@
         <p:spPr>
           <a:xfrm>
             <a:off x="6782210" y="1842655"/>
-            <a:ext cx="2678251" cy="430887"/>
+            <a:ext cx="4864550" cy="430887"/>
           </a:xfrm>
           <a:prstGeom prst="rect">
             <a:avLst/>
@@ -28347,7 +28349,7 @@
       </p:grpSpPr>
       <p:sp>
         <p:nvSpPr>
-          <p:cNvPr id="2" name="矩形: 剪去同側角落 1">
+          <p:cNvPr id="2" name="矩形: 剪去同側角落">
             <a:extLst>
               <a:ext uri="{FF2B5EF4-FFF2-40B4-BE49-F238E27FC236}">
                 <a16:creationId xmlns:a16="http://schemas.microsoft.com/office/drawing/2014/main" id="{B75BE523-0625-07DE-3900-9DA5D3F70815}"/>
@@ -29364,17 +29366,6 @@
 </file>
 
 <file path=customXml/item1.xml><?xml version="1.0" encoding="utf-8"?>
-<p:properties xmlns:p="http://schemas.microsoft.com/office/2006/metadata/properties" xmlns:xsi="http://www.w3.org/2001/XMLSchema-instance" xmlns:pc="http://schemas.microsoft.com/office/infopath/2007/PartnerControls">
-  <documentManagement>
-    <TaxCatchAll xmlns="0ba46b80-6b01-4346-9b2c-03da308a0634" xsi:nil="true"/>
-    <lcf76f155ced4ddcb4097134ff3c332f xmlns="8a3f5d65-52d1-40ef-a941-5f46bf66d567">
-      <Terms xmlns="http://schemas.microsoft.com/office/infopath/2007/PartnerControls"/>
-    </lcf76f155ced4ddcb4097134ff3c332f>
-  </documentManagement>
-</p:properties>
-</file>
-
-<file path=customXml/item2.xml><?xml version="1.0" encoding="utf-8"?>
 <ct:contentTypeSchema xmlns:ct="http://schemas.microsoft.com/office/2006/metadata/contentType" xmlns:ma="http://schemas.microsoft.com/office/2006/metadata/properties/metaAttributes" ct:_="" ma:_="" ma:contentTypeName="Document" ma:contentTypeID="0x01010090C1A6ACEABD7442B1C9ED28EAB6C5DB" ma:contentTypeVersion="10" ma:contentTypeDescription="Create a new document." ma:contentTypeScope="" ma:versionID="2c83e620360763aa9bb6ca6f6e90dabe">
   <xsd:schema xmlns:xsd="http://www.w3.org/2001/XMLSchema" xmlns:xs="http://www.w3.org/2001/XMLSchema" xmlns:p="http://schemas.microsoft.com/office/2006/metadata/properties" xmlns:ns2="8a3f5d65-52d1-40ef-a941-5f46bf66d567" xmlns:ns3="0ba46b80-6b01-4346-9b2c-03da308a0634" targetNamespace="http://schemas.microsoft.com/office/2006/metadata/properties" ma:root="true" ma:fieldsID="f21e7a31f88a4c502cacedf435dd6efe" ns2:_="" ns3:_="">
     <xsd:import namespace="8a3f5d65-52d1-40ef-a941-5f46bf66d567"/>
@@ -29563,6 +29554,17 @@
 </ct:contentTypeSchema>
 </file>
 
+<file path=customXml/item2.xml><?xml version="1.0" encoding="utf-8"?>
+<p:properties xmlns:p="http://schemas.microsoft.com/office/2006/metadata/properties" xmlns:xsi="http://www.w3.org/2001/XMLSchema-instance" xmlns:pc="http://schemas.microsoft.com/office/infopath/2007/PartnerControls">
+  <documentManagement>
+    <TaxCatchAll xmlns="0ba46b80-6b01-4346-9b2c-03da308a0634" xsi:nil="true"/>
+    <lcf76f155ced4ddcb4097134ff3c332f xmlns="8a3f5d65-52d1-40ef-a941-5f46bf66d567">
+      <Terms xmlns="http://schemas.microsoft.com/office/infopath/2007/PartnerControls"/>
+    </lcf76f155ced4ddcb4097134ff3c332f>
+  </documentManagement>
+</p:properties>
+</file>
+
 <file path=customXml/item3.xml><?xml version="1.0" encoding="utf-8"?>
 <?mso-contentType ?>
 <FormTemplates xmlns="http://schemas.microsoft.com/sharepoint/v3/contenttype/forms">
@@ -29573,17 +29575,6 @@
 </file>
 
 <file path=customXml/itemProps1.xml><?xml version="1.0" encoding="utf-8"?>
-<ds:datastoreItem xmlns:ds="http://schemas.openxmlformats.org/officeDocument/2006/customXml" ds:itemID="{8AAED483-C87A-4A4D-97D9-4D668F30684D}">
-  <ds:schemaRefs>
-    <ds:schemaRef ds:uri="http://schemas.microsoft.com/office/2006/metadata/properties"/>
-    <ds:schemaRef ds:uri="http://schemas.microsoft.com/office/infopath/2007/PartnerControls"/>
-    <ds:schemaRef ds:uri="0ba46b80-6b01-4346-9b2c-03da308a0634"/>
-    <ds:schemaRef ds:uri="8a3f5d65-52d1-40ef-a941-5f46bf66d567"/>
-  </ds:schemaRefs>
-</ds:datastoreItem>
-</file>
-
-<file path=customXml/itemProps2.xml><?xml version="1.0" encoding="utf-8"?>
 <ds:datastoreItem xmlns:ds="http://schemas.openxmlformats.org/officeDocument/2006/customXml" ds:itemID="{B0EC0026-1517-457D-8D55-FDA8F64F7ACC}">
   <ds:schemaRefs>
     <ds:schemaRef ds:uri="http://schemas.microsoft.com/office/2006/metadata/contentType"/>
@@ -29602,6 +29593,17 @@
 </ds:datastoreItem>
 </file>
 
+<file path=customXml/itemProps2.xml><?xml version="1.0" encoding="utf-8"?>
+<ds:datastoreItem xmlns:ds="http://schemas.openxmlformats.org/officeDocument/2006/customXml" ds:itemID="{8AAED483-C87A-4A4D-97D9-4D668F30684D}">
+  <ds:schemaRefs>
+    <ds:schemaRef ds:uri="http://schemas.microsoft.com/office/2006/metadata/properties"/>
+    <ds:schemaRef ds:uri="http://schemas.microsoft.com/office/infopath/2007/PartnerControls"/>
+    <ds:schemaRef ds:uri="0ba46b80-6b01-4346-9b2c-03da308a0634"/>
+    <ds:schemaRef ds:uri="8a3f5d65-52d1-40ef-a941-5f46bf66d567"/>
+  </ds:schemaRefs>
+</ds:datastoreItem>
+</file>
+
 <file path=customXml/itemProps3.xml><?xml version="1.0" encoding="utf-8"?>
 <ds:datastoreItem xmlns:ds="http://schemas.openxmlformats.org/officeDocument/2006/customXml" ds:itemID="{04ECE26A-46C9-411F-8B9D-26BC5CDC55C0}">
   <ds:schemaRefs>

--- a/template.pptx
+++ b/template.pptx
@@ -4979,7 +4979,7 @@
       <dsp:spPr>
         <a:xfrm>
           <a:off x="0" y="0"/>
-          <a:ext cx="6258560" cy="975360"/>
+          <a:ext cx="5929365" cy="793641"/>
         </a:xfrm>
         <a:prstGeom prst="roundRect">
           <a:avLst>
@@ -5024,12 +5024,12 @@
         </a:fontRef>
       </dsp:style>
       <dsp:txBody>
-        <a:bodyPr spcFirstLastPara="0" vert="horz" wrap="square" lIns="121920" tIns="121920" rIns="121920" bIns="121920" numCol="1" spcCol="1270" anchor="ctr" anchorCtr="0">
+        <a:bodyPr spcFirstLastPara="0" vert="horz" wrap="square" lIns="99060" tIns="99060" rIns="99060" bIns="99060" numCol="1" spcCol="1270" anchor="ctr" anchorCtr="0">
           <a:noAutofit/>
         </a:bodyPr>
         <a:lstStyle/>
         <a:p>
-          <a:pPr marL="0" lvl="0" indent="0" algn="l" defTabSz="1422400">
+          <a:pPr marL="0" lvl="0" indent="0" algn="l" defTabSz="1155700">
             <a:lnSpc>
               <a:spcPct val="90000"/>
             </a:lnSpc>
@@ -5041,12 +5041,12 @@
             </a:spcAft>
             <a:buNone/>
           </a:pPr>
-          <a:endParaRPr lang="zh-TW" altLang="en-US" sz="3200" kern="1200" dirty="0"/>
+          <a:endParaRPr lang="zh-TW" altLang="en-US" sz="2600" kern="1200" dirty="0"/>
         </a:p>
       </dsp:txBody>
       <dsp:txXfrm>
-        <a:off x="28567" y="28567"/>
-        <a:ext cx="5091953" cy="918226"/>
+        <a:off x="23245" y="23245"/>
+        <a:ext cx="4980108" cy="747151"/>
       </dsp:txXfrm>
     </dsp:sp>
     <dsp:sp modelId="{83C97043-6098-48E8-8E6F-56F76A78BE3F}">
@@ -5056,8 +5056,8 @@
       </dsp:nvSpPr>
       <dsp:spPr>
         <a:xfrm>
-          <a:off x="467360" y="1110826"/>
-          <a:ext cx="6258560" cy="975360"/>
+          <a:off x="442777" y="903869"/>
+          <a:ext cx="5929365" cy="793641"/>
         </a:xfrm>
         <a:prstGeom prst="roundRect">
           <a:avLst>
@@ -5102,12 +5102,12 @@
         </a:fontRef>
       </dsp:style>
       <dsp:txBody>
-        <a:bodyPr spcFirstLastPara="0" vert="horz" wrap="square" lIns="121920" tIns="121920" rIns="121920" bIns="121920" numCol="1" spcCol="1270" anchor="ctr" anchorCtr="0">
+        <a:bodyPr spcFirstLastPara="0" vert="horz" wrap="square" lIns="99060" tIns="99060" rIns="99060" bIns="99060" numCol="1" spcCol="1270" anchor="ctr" anchorCtr="0">
           <a:noAutofit/>
         </a:bodyPr>
         <a:lstStyle/>
         <a:p>
-          <a:pPr marL="0" lvl="0" indent="0" algn="l" defTabSz="1422400">
+          <a:pPr marL="0" lvl="0" indent="0" algn="l" defTabSz="1155700">
             <a:lnSpc>
               <a:spcPct val="90000"/>
             </a:lnSpc>
@@ -5119,12 +5119,12 @@
             </a:spcAft>
             <a:buNone/>
           </a:pPr>
-          <a:endParaRPr lang="zh-TW" altLang="en-US" sz="3200" kern="1200" dirty="0"/>
+          <a:endParaRPr lang="zh-TW" altLang="en-US" sz="2600" kern="1200" dirty="0"/>
         </a:p>
       </dsp:txBody>
       <dsp:txXfrm>
-        <a:off x="495927" y="1139393"/>
-        <a:ext cx="5100081" cy="918226"/>
+        <a:off x="466022" y="927114"/>
+        <a:ext cx="4924231" cy="747151"/>
       </dsp:txXfrm>
     </dsp:sp>
     <dsp:sp modelId="{5F30B50C-A660-4EA3-ABBE-C7D6FD514E14}">
@@ -5134,8 +5134,8 @@
       </dsp:nvSpPr>
       <dsp:spPr>
         <a:xfrm>
-          <a:off x="934719" y="2221653"/>
-          <a:ext cx="6258560" cy="975360"/>
+          <a:off x="885554" y="1807739"/>
+          <a:ext cx="5929365" cy="793641"/>
         </a:xfrm>
         <a:prstGeom prst="roundRect">
           <a:avLst>
@@ -5180,12 +5180,12 @@
         </a:fontRef>
       </dsp:style>
       <dsp:txBody>
-        <a:bodyPr spcFirstLastPara="0" vert="horz" wrap="square" lIns="121920" tIns="121920" rIns="121920" bIns="121920" numCol="1" spcCol="1270" anchor="ctr" anchorCtr="0">
+        <a:bodyPr spcFirstLastPara="0" vert="horz" wrap="square" lIns="99060" tIns="99060" rIns="99060" bIns="99060" numCol="1" spcCol="1270" anchor="ctr" anchorCtr="0">
           <a:noAutofit/>
         </a:bodyPr>
         <a:lstStyle/>
         <a:p>
-          <a:pPr marL="0" lvl="0" indent="0" algn="l" defTabSz="1422400">
+          <a:pPr marL="0" lvl="0" indent="0" algn="l" defTabSz="1155700">
             <a:lnSpc>
               <a:spcPct val="90000"/>
             </a:lnSpc>
@@ -5197,12 +5197,12 @@
             </a:spcAft>
             <a:buNone/>
           </a:pPr>
-          <a:endParaRPr lang="zh-TW" altLang="en-US" sz="3200" kern="1200" dirty="0"/>
+          <a:endParaRPr lang="zh-TW" altLang="en-US" sz="2600" kern="1200" dirty="0"/>
         </a:p>
       </dsp:txBody>
       <dsp:txXfrm>
-        <a:off x="963286" y="2250220"/>
-        <a:ext cx="5100081" cy="918226"/>
+        <a:off x="908799" y="1830984"/>
+        <a:ext cx="4924231" cy="747151"/>
       </dsp:txXfrm>
     </dsp:sp>
     <dsp:sp modelId="{F8C82C79-29AA-4B27-BB64-BF6DA2B31CAD}">
@@ -5212,8 +5212,8 @@
       </dsp:nvSpPr>
       <dsp:spPr>
         <a:xfrm>
-          <a:off x="1402079" y="3332480"/>
-          <a:ext cx="6258560" cy="975360"/>
+          <a:off x="1328331" y="2711609"/>
+          <a:ext cx="5929365" cy="793641"/>
         </a:xfrm>
         <a:prstGeom prst="roundRect">
           <a:avLst>
@@ -5258,12 +5258,12 @@
         </a:fontRef>
       </dsp:style>
       <dsp:txBody>
-        <a:bodyPr spcFirstLastPara="0" vert="horz" wrap="square" lIns="160020" tIns="160020" rIns="160020" bIns="160020" numCol="1" spcCol="1270" anchor="ctr" anchorCtr="0">
+        <a:bodyPr spcFirstLastPara="0" vert="horz" wrap="square" lIns="129540" tIns="129540" rIns="129540" bIns="129540" numCol="1" spcCol="1270" anchor="ctr" anchorCtr="0">
           <a:noAutofit/>
         </a:bodyPr>
         <a:lstStyle/>
         <a:p>
-          <a:pPr marL="0" lvl="0" indent="0" algn="l" defTabSz="1866900">
+          <a:pPr marL="0" lvl="0" indent="0" algn="l" defTabSz="1511300">
             <a:lnSpc>
               <a:spcPct val="90000"/>
             </a:lnSpc>
@@ -5275,12 +5275,12 @@
             </a:spcAft>
             <a:buNone/>
           </a:pPr>
-          <a:endParaRPr lang="zh-TW" altLang="en-US" sz="4200" kern="1200" dirty="0"/>
+          <a:endParaRPr lang="zh-TW" altLang="en-US" sz="3400" kern="1200" dirty="0"/>
         </a:p>
       </dsp:txBody>
       <dsp:txXfrm>
-        <a:off x="1430646" y="3361047"/>
-        <a:ext cx="5100081" cy="918226"/>
+        <a:off x="1351576" y="2734854"/>
+        <a:ext cx="4924231" cy="747151"/>
       </dsp:txXfrm>
     </dsp:sp>
     <dsp:sp modelId="{DE386499-10C3-45F8-9C63-ACDC9AB2D8EF}">
@@ -5290,8 +5290,8 @@
       </dsp:nvSpPr>
       <dsp:spPr>
         <a:xfrm>
-          <a:off x="1869439" y="4443306"/>
-          <a:ext cx="6258560" cy="975360"/>
+          <a:off x="1771109" y="3615479"/>
+          <a:ext cx="5929365" cy="793641"/>
         </a:xfrm>
         <a:prstGeom prst="roundRect">
           <a:avLst>
@@ -5336,12 +5336,12 @@
         </a:fontRef>
       </dsp:style>
       <dsp:txBody>
-        <a:bodyPr spcFirstLastPara="0" vert="horz" wrap="square" lIns="160020" tIns="160020" rIns="160020" bIns="160020" numCol="1" spcCol="1270" anchor="ctr" anchorCtr="0">
+        <a:bodyPr spcFirstLastPara="0" vert="horz" wrap="square" lIns="129540" tIns="129540" rIns="129540" bIns="129540" numCol="1" spcCol="1270" anchor="ctr" anchorCtr="0">
           <a:noAutofit/>
         </a:bodyPr>
         <a:lstStyle/>
         <a:p>
-          <a:pPr marL="0" lvl="0" indent="0" algn="l" defTabSz="1866900">
+          <a:pPr marL="0" lvl="0" indent="0" algn="l" defTabSz="1511300">
             <a:lnSpc>
               <a:spcPct val="90000"/>
             </a:lnSpc>
@@ -5353,12 +5353,12 @@
             </a:spcAft>
             <a:buNone/>
           </a:pPr>
-          <a:endParaRPr lang="zh-TW" altLang="en-US" sz="4200" kern="1200" dirty="0"/>
+          <a:endParaRPr lang="zh-TW" altLang="en-US" sz="3400" kern="1200" dirty="0"/>
         </a:p>
       </dsp:txBody>
       <dsp:txXfrm>
-        <a:off x="1898006" y="4471873"/>
-        <a:ext cx="5100081" cy="918226"/>
+        <a:off x="1794354" y="3638724"/>
+        <a:ext cx="4924231" cy="747151"/>
       </dsp:txXfrm>
     </dsp:sp>
     <dsp:sp modelId="{725E89E2-1905-4604-99C8-DE62F10D8BF6}">
@@ -5368,8 +5368,8 @@
       </dsp:nvSpPr>
       <dsp:spPr>
         <a:xfrm>
-          <a:off x="5624575" y="712554"/>
-          <a:ext cx="633984" cy="633984"/>
+          <a:off x="5413498" y="579799"/>
+          <a:ext cx="515867" cy="515867"/>
         </a:xfrm>
         <a:prstGeom prst="downArrow">
           <a:avLst>
@@ -5416,12 +5416,12 @@
         <a:fontRef idx="minor"/>
       </dsp:style>
       <dsp:txBody>
-        <a:bodyPr spcFirstLastPara="0" vert="horz" wrap="square" lIns="35560" tIns="35560" rIns="35560" bIns="35560" numCol="1" spcCol="1270" anchor="ctr" anchorCtr="0">
+        <a:bodyPr spcFirstLastPara="0" vert="horz" wrap="square" lIns="29210" tIns="29210" rIns="29210" bIns="29210" numCol="1" spcCol="1270" anchor="ctr" anchorCtr="0">
           <a:noAutofit/>
         </a:bodyPr>
         <a:lstStyle/>
         <a:p>
-          <a:pPr marL="0" lvl="0" indent="0" algn="ctr" defTabSz="1244600">
+          <a:pPr marL="0" lvl="0" indent="0" algn="ctr" defTabSz="1022350">
             <a:lnSpc>
               <a:spcPct val="90000"/>
             </a:lnSpc>
@@ -5433,12 +5433,12 @@
             </a:spcAft>
             <a:buNone/>
           </a:pPr>
-          <a:endParaRPr lang="zh-TW" altLang="en-US" sz="2800" kern="1200"/>
+          <a:endParaRPr lang="zh-TW" altLang="en-US" sz="2300" kern="1200"/>
         </a:p>
       </dsp:txBody>
       <dsp:txXfrm>
-        <a:off x="5767221" y="712554"/>
-        <a:ext cx="348692" cy="477073"/>
+        <a:off x="5529568" y="579799"/>
+        <a:ext cx="283727" cy="388190"/>
       </dsp:txXfrm>
     </dsp:sp>
     <dsp:sp modelId="{F6402685-94C2-4D9F-9B6F-C6B55CCF62DC}">
@@ -5448,8 +5448,8 @@
       </dsp:nvSpPr>
       <dsp:spPr>
         <a:xfrm>
-          <a:off x="6091935" y="1823381"/>
-          <a:ext cx="633984" cy="633984"/>
+          <a:off x="5856275" y="1483669"/>
+          <a:ext cx="515867" cy="515867"/>
         </a:xfrm>
         <a:prstGeom prst="downArrow">
           <a:avLst>
@@ -5496,12 +5496,12 @@
         <a:fontRef idx="minor"/>
       </dsp:style>
       <dsp:txBody>
-        <a:bodyPr spcFirstLastPara="0" vert="horz" wrap="square" lIns="35560" tIns="35560" rIns="35560" bIns="35560" numCol="1" spcCol="1270" anchor="ctr" anchorCtr="0">
+        <a:bodyPr spcFirstLastPara="0" vert="horz" wrap="square" lIns="29210" tIns="29210" rIns="29210" bIns="29210" numCol="1" spcCol="1270" anchor="ctr" anchorCtr="0">
           <a:noAutofit/>
         </a:bodyPr>
         <a:lstStyle/>
         <a:p>
-          <a:pPr marL="0" lvl="0" indent="0" algn="ctr" defTabSz="1244600">
+          <a:pPr marL="0" lvl="0" indent="0" algn="ctr" defTabSz="1022350">
             <a:lnSpc>
               <a:spcPct val="90000"/>
             </a:lnSpc>
@@ -5513,12 +5513,12 @@
             </a:spcAft>
             <a:buNone/>
           </a:pPr>
-          <a:endParaRPr lang="zh-TW" altLang="en-US" sz="2800" kern="1200"/>
+          <a:endParaRPr lang="zh-TW" altLang="en-US" sz="2300" kern="1200"/>
         </a:p>
       </dsp:txBody>
       <dsp:txXfrm>
-        <a:off x="6234581" y="1823381"/>
-        <a:ext cx="348692" cy="477073"/>
+        <a:off x="5972345" y="1483669"/>
+        <a:ext cx="283727" cy="388190"/>
       </dsp:txXfrm>
     </dsp:sp>
     <dsp:sp modelId="{43A7CC9C-9AAC-4E89-A6BC-E9AB52226D73}">
@@ -5528,8 +5528,8 @@
       </dsp:nvSpPr>
       <dsp:spPr>
         <a:xfrm>
-          <a:off x="6559295" y="2917952"/>
-          <a:ext cx="633984" cy="633984"/>
+          <a:off x="6299053" y="2374311"/>
+          <a:ext cx="515867" cy="515867"/>
         </a:xfrm>
         <a:prstGeom prst="downArrow">
           <a:avLst>
@@ -5576,12 +5576,12 @@
         <a:fontRef idx="minor"/>
       </dsp:style>
       <dsp:txBody>
-        <a:bodyPr spcFirstLastPara="0" vert="horz" wrap="square" lIns="35560" tIns="35560" rIns="35560" bIns="35560" numCol="1" spcCol="1270" anchor="ctr" anchorCtr="0">
+        <a:bodyPr spcFirstLastPara="0" vert="horz" wrap="square" lIns="29210" tIns="29210" rIns="29210" bIns="29210" numCol="1" spcCol="1270" anchor="ctr" anchorCtr="0">
           <a:noAutofit/>
         </a:bodyPr>
         <a:lstStyle/>
         <a:p>
-          <a:pPr marL="0" lvl="0" indent="0" algn="ctr" defTabSz="1244600">
+          <a:pPr marL="0" lvl="0" indent="0" algn="ctr" defTabSz="1022350">
             <a:lnSpc>
               <a:spcPct val="90000"/>
             </a:lnSpc>
@@ -5593,12 +5593,12 @@
             </a:spcAft>
             <a:buNone/>
           </a:pPr>
-          <a:endParaRPr lang="zh-TW" altLang="en-US" sz="2800" kern="1200"/>
+          <a:endParaRPr lang="zh-TW" altLang="en-US" sz="2300" kern="1200"/>
         </a:p>
       </dsp:txBody>
       <dsp:txXfrm>
-        <a:off x="6701941" y="2917952"/>
-        <a:ext cx="348692" cy="477073"/>
+        <a:off x="6415123" y="2374311"/>
+        <a:ext cx="283727" cy="388190"/>
       </dsp:txXfrm>
     </dsp:sp>
     <dsp:sp modelId="{0497A49F-9321-4E24-BB7F-341367D89E27}">
@@ -5608,8 +5608,8 @@
       </dsp:nvSpPr>
       <dsp:spPr>
         <a:xfrm>
-          <a:off x="7026655" y="4039616"/>
-          <a:ext cx="633984" cy="633984"/>
+          <a:off x="6741830" y="3286999"/>
+          <a:ext cx="515867" cy="515867"/>
         </a:xfrm>
         <a:prstGeom prst="downArrow">
           <a:avLst>
@@ -5656,12 +5656,12 @@
         <a:fontRef idx="minor"/>
       </dsp:style>
       <dsp:txBody>
-        <a:bodyPr spcFirstLastPara="0" vert="horz" wrap="square" lIns="35560" tIns="35560" rIns="35560" bIns="35560" numCol="1" spcCol="1270" anchor="ctr" anchorCtr="0">
+        <a:bodyPr spcFirstLastPara="0" vert="horz" wrap="square" lIns="29210" tIns="29210" rIns="29210" bIns="29210" numCol="1" spcCol="1270" anchor="ctr" anchorCtr="0">
           <a:noAutofit/>
         </a:bodyPr>
         <a:lstStyle/>
         <a:p>
-          <a:pPr marL="0" lvl="0" indent="0" algn="ctr" defTabSz="1244600">
+          <a:pPr marL="0" lvl="0" indent="0" algn="ctr" defTabSz="1022350">
             <a:lnSpc>
               <a:spcPct val="90000"/>
             </a:lnSpc>
@@ -5673,12 +5673,12 @@
             </a:spcAft>
             <a:buNone/>
           </a:pPr>
-          <a:endParaRPr lang="zh-TW" altLang="en-US" sz="2800" kern="1200"/>
+          <a:endParaRPr lang="zh-TW" altLang="en-US" sz="2300" kern="1200"/>
         </a:p>
       </dsp:txBody>
       <dsp:txXfrm>
-        <a:off x="7169301" y="4039616"/>
-        <a:ext cx="348692" cy="477073"/>
+        <a:off x="6857900" y="3286999"/>
+        <a:ext cx="283727" cy="388190"/>
       </dsp:txXfrm>
     </dsp:sp>
   </dsp:spTree>
@@ -10523,7 +10523,7 @@
           </a:lstStyle>
           <a:p>
             <a:fld id="{7C7898EE-D06A-48FC-AF05-8BC54DC9F027}" type="datetimeFigureOut">
-              <a:t>2026/3/31</a:t>
+              <a:t>2026/4/1</a:t>
             </a:fld>
             <a:endParaRPr lang="zh-TW" altLang="en-US"/>
           </a:p>
@@ -19457,7 +19457,7 @@
           <a:p>
             <a:fld id="{9275EF9D-446A-4BA9-9A8F-8795C824CFA3}" type="datetimeFigureOut">
               <a:rPr lang="zh-TW" altLang="en-US" smtClean="0"/>
-              <a:t>2026/3/31</a:t>
+              <a:t>2026/4/1</a:t>
             </a:fld>
             <a:endParaRPr lang="zh-TW" altLang="en-US"/>
           </a:p>
@@ -21379,6 +21379,78 @@
           </a:p>
         </p:txBody>
       </p:sp>
+      <p:pic>
+        <p:nvPicPr>
+          <p:cNvPr id="2" name="img_2" descr="一張含有 電子產品, 電路, 電子元件, 電路元件 的圖片&#10;&#10;AI 產生的內容可能不正確。">
+            <a:extLst>
+              <a:ext uri="{FF2B5EF4-FFF2-40B4-BE49-F238E27FC236}">
+                <a16:creationId xmlns:a16="http://schemas.microsoft.com/office/drawing/2014/main" id="{381A1B20-9CB0-D0FB-265D-49141943BB1F}"/>
+              </a:ext>
+            </a:extLst>
+          </p:cNvPr>
+          <p:cNvPicPr>
+            <a:picLocks noChangeAspect="1"/>
+          </p:cNvPicPr>
+          <p:nvPr/>
+        </p:nvPicPr>
+        <p:blipFill>
+          <a:blip r:embed="rId2">
+            <a:extLst>
+              <a:ext uri="{28A0092B-C50C-407E-A947-70E740481C1C}">
+                <a14:useLocalDpi xmlns:a14="http://schemas.microsoft.com/office/drawing/2010/main" val="0"/>
+              </a:ext>
+            </a:extLst>
+          </a:blip>
+          <a:stretch>
+            <a:fillRect/>
+          </a:stretch>
+        </p:blipFill>
+        <p:spPr>
+          <a:xfrm>
+            <a:off x="6713174" y="135857"/>
+            <a:ext cx="4750963" cy="3157286"/>
+          </a:xfrm>
+          <a:prstGeom prst="rect">
+            <a:avLst/>
+          </a:prstGeom>
+        </p:spPr>
+      </p:pic>
+      <p:pic>
+        <p:nvPicPr>
+          <p:cNvPr id="4" name="img_1" descr="一張含有 電子產品, 電路, 電子元件, 電路元件 的圖片&#10;&#10;AI 產生的內容可能不正確。">
+            <a:extLst>
+              <a:ext uri="{FF2B5EF4-FFF2-40B4-BE49-F238E27FC236}">
+                <a16:creationId xmlns:a16="http://schemas.microsoft.com/office/drawing/2014/main" id="{5EB2F9D7-746C-07B5-DF3D-6DAC5E817891}"/>
+              </a:ext>
+            </a:extLst>
+          </p:cNvPr>
+          <p:cNvPicPr>
+            <a:picLocks noChangeAspect="1"/>
+          </p:cNvPicPr>
+          <p:nvPr/>
+        </p:nvPicPr>
+        <p:blipFill>
+          <a:blip r:embed="rId2">
+            <a:extLst>
+              <a:ext uri="{28A0092B-C50C-407E-A947-70E740481C1C}">
+                <a14:useLocalDpi xmlns:a14="http://schemas.microsoft.com/office/drawing/2010/main" val="0"/>
+              </a:ext>
+            </a:extLst>
+          </a:blip>
+          <a:stretch>
+            <a:fillRect/>
+          </a:stretch>
+        </p:blipFill>
+        <p:spPr>
+          <a:xfrm>
+            <a:off x="456900" y="3517900"/>
+            <a:ext cx="4750963" cy="3157286"/>
+          </a:xfrm>
+          <a:prstGeom prst="rect">
+            <a:avLst/>
+          </a:prstGeom>
+        </p:spPr>
+      </p:pic>
     </p:spTree>
     <p:extLst>
       <p:ext uri="{BB962C8B-B14F-4D97-AF65-F5344CB8AC3E}">
@@ -23424,7 +23496,7 @@
             </a:extLst>
           </p:cNvPr>
           <p:cNvSpPr>
-            <a:spLocks noGrp="1" noRot="1" noMove="1" noResize="1" noEditPoints="1" noAdjustHandles="1" noChangeArrowheads="1" noChangeShapeType="1"/>
+            <a:spLocks/>
           </p:cNvSpPr>
           <p:nvPr/>
         </p:nvSpPr>
@@ -23598,7 +23670,7 @@
             </a:extLst>
           </p:cNvPr>
           <p:cNvSpPr>
-            <a:spLocks noGrp="1" noRot="1" noMove="1" noResize="1" noEditPoints="1" noAdjustHandles="1" noChangeArrowheads="1" noChangeShapeType="1"/>
+            <a:spLocks/>
           </p:cNvSpPr>
           <p:nvPr/>
         </p:nvSpPr>
@@ -23772,7 +23844,7 @@
             </a:extLst>
           </p:cNvPr>
           <p:cNvSpPr>
-            <a:spLocks noGrp="1" noRot="1" noMove="1" noResize="1" noEditPoints="1" noAdjustHandles="1" noChangeArrowheads="1" noChangeShapeType="1"/>
+            <a:spLocks/>
           </p:cNvSpPr>
           <p:nvPr/>
         </p:nvSpPr>
@@ -23879,14 +23951,14 @@
           <p:nvPr>
             <p:extLst>
               <p:ext uri="{D42A27DB-BD31-4B8C-83A1-F6EECF244321}">
-                <p14:modId xmlns:p14="http://schemas.microsoft.com/office/powerpoint/2010/main" val="3456858419"/>
+                <p14:modId xmlns:p14="http://schemas.microsoft.com/office/powerpoint/2010/main" val="813686360"/>
               </p:ext>
             </p:extLst>
           </p:nvPr>
         </p:nvGraphicFramePr>
         <p:xfrm>
-          <a:off x="2032000" y="719666"/>
-          <a:ext cx="8128000" cy="5418667"/>
+          <a:off x="2245762" y="1224439"/>
+          <a:ext cx="7700475" cy="4409121"/>
         </p:xfrm>
         <a:graphic>
           <a:graphicData uri="http://schemas.openxmlformats.org/drawingml/2006/diagram">
@@ -28357,7 +28429,7 @@
             </a:extLst>
           </p:cNvPr>
           <p:cNvSpPr>
-            <a:spLocks noGrp="1" noRot="1" noMove="1" noResize="1" noEditPoints="1" noAdjustHandles="1" noChangeArrowheads="1" noChangeShapeType="1"/>
+            <a:spLocks/>
           </p:cNvSpPr>
           <p:nvPr/>
         </p:nvSpPr>
@@ -29366,6 +29438,17 @@
 </file>
 
 <file path=customXml/item1.xml><?xml version="1.0" encoding="utf-8"?>
+<p:properties xmlns:p="http://schemas.microsoft.com/office/2006/metadata/properties" xmlns:xsi="http://www.w3.org/2001/XMLSchema-instance" xmlns:pc="http://schemas.microsoft.com/office/infopath/2007/PartnerControls">
+  <documentManagement>
+    <TaxCatchAll xmlns="0ba46b80-6b01-4346-9b2c-03da308a0634" xsi:nil="true"/>
+    <lcf76f155ced4ddcb4097134ff3c332f xmlns="8a3f5d65-52d1-40ef-a941-5f46bf66d567">
+      <Terms xmlns="http://schemas.microsoft.com/office/infopath/2007/PartnerControls"/>
+    </lcf76f155ced4ddcb4097134ff3c332f>
+  </documentManagement>
+</p:properties>
+</file>
+
+<file path=customXml/item2.xml><?xml version="1.0" encoding="utf-8"?>
 <ct:contentTypeSchema xmlns:ct="http://schemas.microsoft.com/office/2006/metadata/contentType" xmlns:ma="http://schemas.microsoft.com/office/2006/metadata/properties/metaAttributes" ct:_="" ma:_="" ma:contentTypeName="Document" ma:contentTypeID="0x01010090C1A6ACEABD7442B1C9ED28EAB6C5DB" ma:contentTypeVersion="10" ma:contentTypeDescription="Create a new document." ma:contentTypeScope="" ma:versionID="2c83e620360763aa9bb6ca6f6e90dabe">
   <xsd:schema xmlns:xsd="http://www.w3.org/2001/XMLSchema" xmlns:xs="http://www.w3.org/2001/XMLSchema" xmlns:p="http://schemas.microsoft.com/office/2006/metadata/properties" xmlns:ns2="8a3f5d65-52d1-40ef-a941-5f46bf66d567" xmlns:ns3="0ba46b80-6b01-4346-9b2c-03da308a0634" targetNamespace="http://schemas.microsoft.com/office/2006/metadata/properties" ma:root="true" ma:fieldsID="f21e7a31f88a4c502cacedf435dd6efe" ns2:_="" ns3:_="">
     <xsd:import namespace="8a3f5d65-52d1-40ef-a941-5f46bf66d567"/>
@@ -29554,17 +29637,6 @@
 </ct:contentTypeSchema>
 </file>
 
-<file path=customXml/item2.xml><?xml version="1.0" encoding="utf-8"?>
-<p:properties xmlns:p="http://schemas.microsoft.com/office/2006/metadata/properties" xmlns:xsi="http://www.w3.org/2001/XMLSchema-instance" xmlns:pc="http://schemas.microsoft.com/office/infopath/2007/PartnerControls">
-  <documentManagement>
-    <TaxCatchAll xmlns="0ba46b80-6b01-4346-9b2c-03da308a0634" xsi:nil="true"/>
-    <lcf76f155ced4ddcb4097134ff3c332f xmlns="8a3f5d65-52d1-40ef-a941-5f46bf66d567">
-      <Terms xmlns="http://schemas.microsoft.com/office/infopath/2007/PartnerControls"/>
-    </lcf76f155ced4ddcb4097134ff3c332f>
-  </documentManagement>
-</p:properties>
-</file>
-
 <file path=customXml/item3.xml><?xml version="1.0" encoding="utf-8"?>
 <?mso-contentType ?>
 <FormTemplates xmlns="http://schemas.microsoft.com/sharepoint/v3/contenttype/forms">
@@ -29575,6 +29647,17 @@
 </file>
 
 <file path=customXml/itemProps1.xml><?xml version="1.0" encoding="utf-8"?>
+<ds:datastoreItem xmlns:ds="http://schemas.openxmlformats.org/officeDocument/2006/customXml" ds:itemID="{8AAED483-C87A-4A4D-97D9-4D668F30684D}">
+  <ds:schemaRefs>
+    <ds:schemaRef ds:uri="http://schemas.microsoft.com/office/2006/metadata/properties"/>
+    <ds:schemaRef ds:uri="http://schemas.microsoft.com/office/infopath/2007/PartnerControls"/>
+    <ds:schemaRef ds:uri="0ba46b80-6b01-4346-9b2c-03da308a0634"/>
+    <ds:schemaRef ds:uri="8a3f5d65-52d1-40ef-a941-5f46bf66d567"/>
+  </ds:schemaRefs>
+</ds:datastoreItem>
+</file>
+
+<file path=customXml/itemProps2.xml><?xml version="1.0" encoding="utf-8"?>
 <ds:datastoreItem xmlns:ds="http://schemas.openxmlformats.org/officeDocument/2006/customXml" ds:itemID="{B0EC0026-1517-457D-8D55-FDA8F64F7ACC}">
   <ds:schemaRefs>
     <ds:schemaRef ds:uri="http://schemas.microsoft.com/office/2006/metadata/contentType"/>
@@ -29593,17 +29676,6 @@
 </ds:datastoreItem>
 </file>
 
-<file path=customXml/itemProps2.xml><?xml version="1.0" encoding="utf-8"?>
-<ds:datastoreItem xmlns:ds="http://schemas.openxmlformats.org/officeDocument/2006/customXml" ds:itemID="{8AAED483-C87A-4A4D-97D9-4D668F30684D}">
-  <ds:schemaRefs>
-    <ds:schemaRef ds:uri="http://schemas.microsoft.com/office/2006/metadata/properties"/>
-    <ds:schemaRef ds:uri="http://schemas.microsoft.com/office/infopath/2007/PartnerControls"/>
-    <ds:schemaRef ds:uri="0ba46b80-6b01-4346-9b2c-03da308a0634"/>
-    <ds:schemaRef ds:uri="8a3f5d65-52d1-40ef-a941-5f46bf66d567"/>
-  </ds:schemaRefs>
-</ds:datastoreItem>
-</file>
-
 <file path=customXml/itemProps3.xml><?xml version="1.0" encoding="utf-8"?>
 <ds:datastoreItem xmlns:ds="http://schemas.openxmlformats.org/officeDocument/2006/customXml" ds:itemID="{04ECE26A-46C9-411F-8B9D-26BC5CDC55C0}">
   <ds:schemaRefs>

--- a/template.pptx
+++ b/template.pptx
@@ -21379,78 +21379,6 @@
           </a:p>
         </p:txBody>
       </p:sp>
-      <p:pic>
-        <p:nvPicPr>
-          <p:cNvPr id="2" name="img_2" descr="一張含有 電子產品, 電路, 電子元件, 電路元件 的圖片&#10;&#10;AI 產生的內容可能不正確。">
-            <a:extLst>
-              <a:ext uri="{FF2B5EF4-FFF2-40B4-BE49-F238E27FC236}">
-                <a16:creationId xmlns:a16="http://schemas.microsoft.com/office/drawing/2014/main" id="{381A1B20-9CB0-D0FB-265D-49141943BB1F}"/>
-              </a:ext>
-            </a:extLst>
-          </p:cNvPr>
-          <p:cNvPicPr>
-            <a:picLocks noChangeAspect="1"/>
-          </p:cNvPicPr>
-          <p:nvPr/>
-        </p:nvPicPr>
-        <p:blipFill>
-          <a:blip r:embed="rId2">
-            <a:extLst>
-              <a:ext uri="{28A0092B-C50C-407E-A947-70E740481C1C}">
-                <a14:useLocalDpi xmlns:a14="http://schemas.microsoft.com/office/drawing/2010/main" val="0"/>
-              </a:ext>
-            </a:extLst>
-          </a:blip>
-          <a:stretch>
-            <a:fillRect/>
-          </a:stretch>
-        </p:blipFill>
-        <p:spPr>
-          <a:xfrm>
-            <a:off x="6713174" y="135857"/>
-            <a:ext cx="4750963" cy="3157286"/>
-          </a:xfrm>
-          <a:prstGeom prst="rect">
-            <a:avLst/>
-          </a:prstGeom>
-        </p:spPr>
-      </p:pic>
-      <p:pic>
-        <p:nvPicPr>
-          <p:cNvPr id="4" name="img_1" descr="一張含有 電子產品, 電路, 電子元件, 電路元件 的圖片&#10;&#10;AI 產生的內容可能不正確。">
-            <a:extLst>
-              <a:ext uri="{FF2B5EF4-FFF2-40B4-BE49-F238E27FC236}">
-                <a16:creationId xmlns:a16="http://schemas.microsoft.com/office/drawing/2014/main" id="{5EB2F9D7-746C-07B5-DF3D-6DAC5E817891}"/>
-              </a:ext>
-            </a:extLst>
-          </p:cNvPr>
-          <p:cNvPicPr>
-            <a:picLocks noChangeAspect="1"/>
-          </p:cNvPicPr>
-          <p:nvPr/>
-        </p:nvPicPr>
-        <p:blipFill>
-          <a:blip r:embed="rId2">
-            <a:extLst>
-              <a:ext uri="{28A0092B-C50C-407E-A947-70E740481C1C}">
-                <a14:useLocalDpi xmlns:a14="http://schemas.microsoft.com/office/drawing/2010/main" val="0"/>
-              </a:ext>
-            </a:extLst>
-          </a:blip>
-          <a:stretch>
-            <a:fillRect/>
-          </a:stretch>
-        </p:blipFill>
-        <p:spPr>
-          <a:xfrm>
-            <a:off x="456900" y="3517900"/>
-            <a:ext cx="4750963" cy="3157286"/>
-          </a:xfrm>
-          <a:prstGeom prst="rect">
-            <a:avLst/>
-          </a:prstGeom>
-        </p:spPr>
-      </p:pic>
     </p:spTree>
     <p:extLst>
       <p:ext uri="{BB962C8B-B14F-4D97-AF65-F5344CB8AC3E}">
@@ -29438,17 +29366,6 @@
 </file>
 
 <file path=customXml/item1.xml><?xml version="1.0" encoding="utf-8"?>
-<p:properties xmlns:p="http://schemas.microsoft.com/office/2006/metadata/properties" xmlns:xsi="http://www.w3.org/2001/XMLSchema-instance" xmlns:pc="http://schemas.microsoft.com/office/infopath/2007/PartnerControls">
-  <documentManagement>
-    <TaxCatchAll xmlns="0ba46b80-6b01-4346-9b2c-03da308a0634" xsi:nil="true"/>
-    <lcf76f155ced4ddcb4097134ff3c332f xmlns="8a3f5d65-52d1-40ef-a941-5f46bf66d567">
-      <Terms xmlns="http://schemas.microsoft.com/office/infopath/2007/PartnerControls"/>
-    </lcf76f155ced4ddcb4097134ff3c332f>
-  </documentManagement>
-</p:properties>
-</file>
-
-<file path=customXml/item2.xml><?xml version="1.0" encoding="utf-8"?>
 <ct:contentTypeSchema xmlns:ct="http://schemas.microsoft.com/office/2006/metadata/contentType" xmlns:ma="http://schemas.microsoft.com/office/2006/metadata/properties/metaAttributes" ct:_="" ma:_="" ma:contentTypeName="Document" ma:contentTypeID="0x01010090C1A6ACEABD7442B1C9ED28EAB6C5DB" ma:contentTypeVersion="10" ma:contentTypeDescription="Create a new document." ma:contentTypeScope="" ma:versionID="2c83e620360763aa9bb6ca6f6e90dabe">
   <xsd:schema xmlns:xsd="http://www.w3.org/2001/XMLSchema" xmlns:xs="http://www.w3.org/2001/XMLSchema" xmlns:p="http://schemas.microsoft.com/office/2006/metadata/properties" xmlns:ns2="8a3f5d65-52d1-40ef-a941-5f46bf66d567" xmlns:ns3="0ba46b80-6b01-4346-9b2c-03da308a0634" targetNamespace="http://schemas.microsoft.com/office/2006/metadata/properties" ma:root="true" ma:fieldsID="f21e7a31f88a4c502cacedf435dd6efe" ns2:_="" ns3:_="">
     <xsd:import namespace="8a3f5d65-52d1-40ef-a941-5f46bf66d567"/>
@@ -29637,6 +29554,17 @@
 </ct:contentTypeSchema>
 </file>
 
+<file path=customXml/item2.xml><?xml version="1.0" encoding="utf-8"?>
+<p:properties xmlns:p="http://schemas.microsoft.com/office/2006/metadata/properties" xmlns:xsi="http://www.w3.org/2001/XMLSchema-instance" xmlns:pc="http://schemas.microsoft.com/office/infopath/2007/PartnerControls">
+  <documentManagement>
+    <TaxCatchAll xmlns="0ba46b80-6b01-4346-9b2c-03da308a0634" xsi:nil="true"/>
+    <lcf76f155ced4ddcb4097134ff3c332f xmlns="8a3f5d65-52d1-40ef-a941-5f46bf66d567">
+      <Terms xmlns="http://schemas.microsoft.com/office/infopath/2007/PartnerControls"/>
+    </lcf76f155ced4ddcb4097134ff3c332f>
+  </documentManagement>
+</p:properties>
+</file>
+
 <file path=customXml/item3.xml><?xml version="1.0" encoding="utf-8"?>
 <?mso-contentType ?>
 <FormTemplates xmlns="http://schemas.microsoft.com/sharepoint/v3/contenttype/forms">
@@ -29647,17 +29575,6 @@
 </file>
 
 <file path=customXml/itemProps1.xml><?xml version="1.0" encoding="utf-8"?>
-<ds:datastoreItem xmlns:ds="http://schemas.openxmlformats.org/officeDocument/2006/customXml" ds:itemID="{8AAED483-C87A-4A4D-97D9-4D668F30684D}">
-  <ds:schemaRefs>
-    <ds:schemaRef ds:uri="http://schemas.microsoft.com/office/2006/metadata/properties"/>
-    <ds:schemaRef ds:uri="http://schemas.microsoft.com/office/infopath/2007/PartnerControls"/>
-    <ds:schemaRef ds:uri="0ba46b80-6b01-4346-9b2c-03da308a0634"/>
-    <ds:schemaRef ds:uri="8a3f5d65-52d1-40ef-a941-5f46bf66d567"/>
-  </ds:schemaRefs>
-</ds:datastoreItem>
-</file>
-
-<file path=customXml/itemProps2.xml><?xml version="1.0" encoding="utf-8"?>
 <ds:datastoreItem xmlns:ds="http://schemas.openxmlformats.org/officeDocument/2006/customXml" ds:itemID="{B0EC0026-1517-457D-8D55-FDA8F64F7ACC}">
   <ds:schemaRefs>
     <ds:schemaRef ds:uri="http://schemas.microsoft.com/office/2006/metadata/contentType"/>
@@ -29676,6 +29593,17 @@
 </ds:datastoreItem>
 </file>
 
+<file path=customXml/itemProps2.xml><?xml version="1.0" encoding="utf-8"?>
+<ds:datastoreItem xmlns:ds="http://schemas.openxmlformats.org/officeDocument/2006/customXml" ds:itemID="{8AAED483-C87A-4A4D-97D9-4D668F30684D}">
+  <ds:schemaRefs>
+    <ds:schemaRef ds:uri="http://schemas.microsoft.com/office/2006/metadata/properties"/>
+    <ds:schemaRef ds:uri="http://schemas.microsoft.com/office/infopath/2007/PartnerControls"/>
+    <ds:schemaRef ds:uri="0ba46b80-6b01-4346-9b2c-03da308a0634"/>
+    <ds:schemaRef ds:uri="8a3f5d65-52d1-40ef-a941-5f46bf66d567"/>
+  </ds:schemaRefs>
+</ds:datastoreItem>
+</file>
+
 <file path=customXml/itemProps3.xml><?xml version="1.0" encoding="utf-8"?>
 <ds:datastoreItem xmlns:ds="http://schemas.openxmlformats.org/officeDocument/2006/customXml" ds:itemID="{04ECE26A-46C9-411F-8B9D-26BC5CDC55C0}">
   <ds:schemaRefs>
